--- a/public/decks/horeca.pptx
+++ b/public/decks/horeca.pptx
@@ -1749,9 +1749,9 @@
                 <a:solidFill>
                   <a:srgbClr val="F0D9C4"/>
                 </a:solidFill>
-                <a:latin typeface="Calibri" pitchFamily="34" charset="0"/>
-                <a:ea typeface="Calibri" pitchFamily="34" charset="-122"/>
-                <a:cs typeface="Calibri" pitchFamily="34" charset="-120"/>
+                <a:latin typeface="Arial" pitchFamily="34" charset="0"/>
+                <a:ea typeface="Arial" pitchFamily="34" charset="-122"/>
+                <a:cs typeface="Arial" pitchFamily="34" charset="-120"/>
               </a:rPr>
               <a:t>СТУДИЯ</a:t>
             </a:r>
@@ -1763,9 +1763,9 @@
                 <a:solidFill>
                   <a:srgbClr val="C9A88F"/>
                 </a:solidFill>
-                <a:latin typeface="Calibri" pitchFamily="34" charset="0"/>
-                <a:ea typeface="Calibri" pitchFamily="34" charset="-122"/>
-                <a:cs typeface="Calibri" pitchFamily="34" charset="-120"/>
+                <a:latin typeface="Arial" pitchFamily="34" charset="0"/>
+                <a:ea typeface="Arial" pitchFamily="34" charset="-122"/>
+                <a:cs typeface="Arial" pitchFamily="34" charset="-120"/>
               </a:rPr>
               <a:t>  ·  HORECA</a:t>
             </a:r>
@@ -1798,17 +1798,17 @@
               <a:buNone/>
             </a:pPr>
             <a:r>
-              <a:rPr lang="en-US" sz="1100" b="1" spc="300" kern="0" dirty="0">
+              <a:rPr lang="en-US" sz="1050" b="1" spc="340" kern="0" dirty="0">
                 <a:solidFill>
                   <a:srgbClr val="F2C14E"/>
                 </a:solidFill>
-                <a:latin typeface="Calibri" pitchFamily="34" charset="0"/>
-                <a:ea typeface="Calibri" pitchFamily="34" charset="-122"/>
-                <a:cs typeface="Calibri" pitchFamily="34" charset="-120"/>
-              </a:rPr>
-              <a:t>ГИД ДЛЯ КАФЕ И РЕСТОРАНОВ</a:t>
-            </a:r>
-            <a:endParaRPr lang="en-US" sz="1100" dirty="0"/>
+                <a:latin typeface="Arial" pitchFamily="34" charset="0"/>
+                <a:ea typeface="Arial" pitchFamily="34" charset="-122"/>
+                <a:cs typeface="Arial" pitchFamily="34" charset="-120"/>
+              </a:rPr>
+              <a:t>◆  ГИД ДЛЯ КАФЕ И РЕСТОРАНОВ</a:t>
+            </a:r>
+            <a:endParaRPr lang="en-US" sz="1050" dirty="0"/>
           </a:p>
         </p:txBody>
       </p:sp>
@@ -1841,9 +1841,9 @@
                 <a:solidFill>
                   <a:srgbClr val="FFFFFF"/>
                 </a:solidFill>
-                <a:latin typeface="Georgia" pitchFamily="34" charset="0"/>
-                <a:ea typeface="Georgia" pitchFamily="34" charset="-122"/>
-                <a:cs typeface="Georgia" pitchFamily="34" charset="-120"/>
+                <a:latin typeface="Bookman Old Style" pitchFamily="34" charset="0"/>
+                <a:ea typeface="Bookman Old Style" pitchFamily="34" charset="-122"/>
+                <a:cs typeface="Bookman Old Style" pitchFamily="34" charset="-120"/>
               </a:rPr>
               <a:t>Меню, которое продаёт</a:t>
             </a:r>
@@ -1883,9 +1883,9 @@
                 <a:solidFill>
                   <a:srgbClr val="E3CDBB"/>
                 </a:solidFill>
-                <a:latin typeface="Calibri" pitchFamily="34" charset="0"/>
-                <a:ea typeface="Calibri" pitchFamily="34" charset="-122"/>
-                <a:cs typeface="Calibri" pitchFamily="34" charset="-120"/>
+                <a:latin typeface="Arial" pitchFamily="34" charset="0"/>
+                <a:ea typeface="Arial" pitchFamily="34" charset="-122"/>
+                <a:cs typeface="Arial" pitchFamily="34" charset="-120"/>
               </a:rPr>
               <a:t>Как поднять средний чек и заполнить будни,</a:t>
             </a:r>
@@ -1903,9 +1903,9 @@
                 <a:solidFill>
                   <a:srgbClr val="E3CDBB"/>
                 </a:solidFill>
-                <a:latin typeface="Calibri" pitchFamily="34" charset="0"/>
-                <a:ea typeface="Calibri" pitchFamily="34" charset="-122"/>
-                <a:cs typeface="Calibri" pitchFamily="34" charset="-120"/>
+                <a:latin typeface="Arial" pitchFamily="34" charset="0"/>
+                <a:ea typeface="Arial" pitchFamily="34" charset="-122"/>
+                <a:cs typeface="Arial" pitchFamily="34" charset="-120"/>
               </a:rPr>
               <a:t>не трогая цены в прайсе</a:t>
             </a:r>
@@ -2018,9 +2018,9 @@
                 <a:solidFill>
                   <a:srgbClr val="F0D9C4"/>
                 </a:solidFill>
-                <a:latin typeface="Calibri" pitchFamily="34" charset="0"/>
-                <a:ea typeface="Calibri" pitchFamily="34" charset="-122"/>
-                <a:cs typeface="Calibri" pitchFamily="34" charset="-120"/>
+                <a:latin typeface="Arial" pitchFamily="34" charset="0"/>
+                <a:ea typeface="Arial" pitchFamily="34" charset="-122"/>
+                <a:cs typeface="Arial" pitchFamily="34" charset="-120"/>
               </a:rPr>
               <a:t>СТУДИЯ</a:t>
             </a:r>
@@ -2032,9 +2032,9 @@
                 <a:solidFill>
                   <a:srgbClr val="C9A88F"/>
                 </a:solidFill>
-                <a:latin typeface="Calibri" pitchFamily="34" charset="0"/>
-                <a:ea typeface="Calibri" pitchFamily="34" charset="-122"/>
-                <a:cs typeface="Calibri" pitchFamily="34" charset="-120"/>
+                <a:latin typeface="Arial" pitchFamily="34" charset="0"/>
+                <a:ea typeface="Arial" pitchFamily="34" charset="-122"/>
+                <a:cs typeface="Arial" pitchFamily="34" charset="-120"/>
               </a:rPr>
               <a:t>  ·  HORECA</a:t>
             </a:r>
@@ -2067,17 +2067,17 @@
               <a:buNone/>
             </a:pPr>
             <a:r>
-              <a:rPr lang="en-US" sz="1100" b="1" spc="300" kern="0" dirty="0">
+              <a:rPr lang="en-US" sz="1050" b="1" spc="340" kern="0" dirty="0">
                 <a:solidFill>
                   <a:srgbClr val="F2C14E"/>
                 </a:solidFill>
-                <a:latin typeface="Calibri" pitchFamily="34" charset="0"/>
-                <a:ea typeface="Calibri" pitchFamily="34" charset="-122"/>
-                <a:cs typeface="Calibri" pitchFamily="34" charset="-120"/>
-              </a:rPr>
-              <a:t>СЛЕДУЮЩИЙ ШАГ</a:t>
-            </a:r>
-            <a:endParaRPr lang="en-US" sz="1100" dirty="0"/>
+                <a:latin typeface="Arial" pitchFamily="34" charset="0"/>
+                <a:ea typeface="Arial" pitchFamily="34" charset="-122"/>
+                <a:cs typeface="Arial" pitchFamily="34" charset="-120"/>
+              </a:rPr>
+              <a:t>◆  СЛЕДУЮЩИЙ ШАГ</a:t>
+            </a:r>
+            <a:endParaRPr lang="en-US" sz="1050" dirty="0"/>
           </a:p>
         </p:txBody>
       </p:sp>
@@ -2113,9 +2113,9 @@
                 <a:solidFill>
                   <a:srgbClr val="FFFFFF"/>
                 </a:solidFill>
-                <a:latin typeface="Georgia" pitchFamily="34" charset="0"/>
-                <a:ea typeface="Georgia" pitchFamily="34" charset="-122"/>
-                <a:cs typeface="Georgia" pitchFamily="34" charset="-120"/>
+                <a:latin typeface="Bookman Old Style" pitchFamily="34" charset="0"/>
+                <a:ea typeface="Bookman Old Style" pitchFamily="34" charset="-122"/>
+                <a:cs typeface="Bookman Old Style" pitchFamily="34" charset="-120"/>
               </a:rPr>
               <a:t>Пусть меню работает</a:t>
             </a:r>
@@ -2133,9 +2133,9 @@
                 <a:solidFill>
                   <a:srgbClr val="FFFFFF"/>
                 </a:solidFill>
-                <a:latin typeface="Georgia" pitchFamily="34" charset="0"/>
-                <a:ea typeface="Georgia" pitchFamily="34" charset="-122"/>
-                <a:cs typeface="Georgia" pitchFamily="34" charset="-120"/>
+                <a:latin typeface="Bookman Old Style" pitchFamily="34" charset="0"/>
+                <a:ea typeface="Bookman Old Style" pitchFamily="34" charset="-122"/>
+                <a:cs typeface="Bookman Old Style" pitchFamily="34" charset="-120"/>
               </a:rPr>
               <a:t>за вас каждый вечер</a:t>
             </a:r>
@@ -2194,9 +2194,9 @@
                 <a:solidFill>
                   <a:srgbClr val="FFFFFF"/>
                 </a:solidFill>
-                <a:latin typeface="Calibri" pitchFamily="34" charset="0"/>
-                <a:ea typeface="Calibri" pitchFamily="34" charset="-122"/>
-                <a:cs typeface="Calibri" pitchFamily="34" charset="-120"/>
+                <a:latin typeface="Arial" pitchFamily="34" charset="0"/>
+                <a:ea typeface="Arial" pitchFamily="34" charset="-122"/>
+                <a:cs typeface="Arial" pitchFamily="34" charset="-120"/>
               </a:rPr>
               <a:t>Разобрать моё меню</a:t>
             </a:r>
@@ -2233,9 +2233,9 @@
                 <a:solidFill>
                   <a:srgbClr val="C9A88F"/>
                 </a:solidFill>
-                <a:latin typeface="Calibri" pitchFamily="34" charset="0"/>
-                <a:ea typeface="Calibri" pitchFamily="34" charset="-122"/>
-                <a:cs typeface="Calibri" pitchFamily="34" charset="-120"/>
+                <a:latin typeface="Arial" pitchFamily="34" charset="0"/>
+                <a:ea typeface="Arial" pitchFamily="34" charset="-122"/>
+                <a:cs typeface="Arial" pitchFamily="34" charset="-120"/>
               </a:rPr>
               <a:t>Демо-материал портфолио · бренд вымышленный</a:t>
             </a:r>
@@ -2300,17 +2300,17 @@
               <a:buNone/>
             </a:pPr>
             <a:r>
-              <a:rPr lang="en-US" sz="1100" b="1" spc="300" kern="0" dirty="0">
+              <a:rPr lang="en-US" sz="1050" b="1" spc="340" kern="0" dirty="0">
                 <a:solidFill>
                   <a:srgbClr val="D5283A"/>
                 </a:solidFill>
-                <a:latin typeface="Calibri" pitchFamily="34" charset="0"/>
-                <a:ea typeface="Calibri" pitchFamily="34" charset="-122"/>
-                <a:cs typeface="Calibri" pitchFamily="34" charset="-120"/>
-              </a:rPr>
-              <a:t>ПРОБЛЕМА</a:t>
-            </a:r>
-            <a:endParaRPr lang="en-US" sz="1100" dirty="0"/>
+                <a:latin typeface="Arial" pitchFamily="34" charset="0"/>
+                <a:ea typeface="Arial" pitchFamily="34" charset="-122"/>
+                <a:cs typeface="Arial" pitchFamily="34" charset="-120"/>
+              </a:rPr>
+              <a:t>◆  ПРОБЛЕМА</a:t>
+            </a:r>
+            <a:endParaRPr lang="en-US" sz="1050" dirty="0"/>
           </a:p>
         </p:txBody>
       </p:sp>
@@ -2343,9 +2343,9 @@
                 <a:solidFill>
                   <a:srgbClr val="2A1620"/>
                 </a:solidFill>
-                <a:latin typeface="Georgia" pitchFamily="34" charset="0"/>
-                <a:ea typeface="Georgia" pitchFamily="34" charset="-122"/>
-                <a:cs typeface="Georgia" pitchFamily="34" charset="-120"/>
+                <a:latin typeface="Bookman Old Style" pitchFamily="34" charset="0"/>
+                <a:ea typeface="Bookman Old Style" pitchFamily="34" charset="-122"/>
+                <a:cs typeface="Bookman Old Style" pitchFamily="34" charset="-120"/>
               </a:rPr>
               <a:t>Гость решает быстрее, чем вы успеваете предложить</a:t>
             </a:r>
@@ -2409,9 +2409,9 @@
                 <a:solidFill>
                   <a:srgbClr val="E0A100"/>
                 </a:solidFill>
-                <a:latin typeface="Georgia" pitchFamily="34" charset="0"/>
-                <a:ea typeface="Georgia" pitchFamily="34" charset="-122"/>
-                <a:cs typeface="Georgia" pitchFamily="34" charset="-120"/>
+                <a:latin typeface="Bookman Old Style" pitchFamily="34" charset="0"/>
+                <a:ea typeface="Bookman Old Style" pitchFamily="34" charset="-122"/>
+                <a:cs typeface="Bookman Old Style" pitchFamily="34" charset="-120"/>
               </a:rPr>
               <a:t>15–30 сек</a:t>
             </a:r>
@@ -2448,9 +2448,9 @@
                 <a:solidFill>
                   <a:srgbClr val="2A1620"/>
                 </a:solidFill>
-                <a:latin typeface="Calibri" pitchFamily="34" charset="0"/>
-                <a:ea typeface="Calibri" pitchFamily="34" charset="-122"/>
-                <a:cs typeface="Calibri" pitchFamily="34" charset="-120"/>
+                <a:latin typeface="Arial" pitchFamily="34" charset="0"/>
+                <a:ea typeface="Arial" pitchFamily="34" charset="-122"/>
+                <a:cs typeface="Arial" pitchFamily="34" charset="-120"/>
               </a:rPr>
               <a:t>столько гость смотрит меню или витрину доставки, прежде чем выбрать</a:t>
             </a:r>
@@ -2514,9 +2514,9 @@
                 <a:solidFill>
                   <a:srgbClr val="D5283A"/>
                 </a:solidFill>
-                <a:latin typeface="Georgia" pitchFamily="34" charset="0"/>
-                <a:ea typeface="Georgia" pitchFamily="34" charset="-122"/>
-                <a:cs typeface="Georgia" pitchFamily="34" charset="-120"/>
+                <a:latin typeface="Bookman Old Style" pitchFamily="34" charset="0"/>
+                <a:ea typeface="Bookman Old Style" pitchFamily="34" charset="-122"/>
+                <a:cs typeface="Bookman Old Style" pitchFamily="34" charset="-120"/>
               </a:rPr>
               <a:t>×5–25</a:t>
             </a:r>
@@ -2553,9 +2553,9 @@
                 <a:solidFill>
                   <a:srgbClr val="2A1620"/>
                 </a:solidFill>
-                <a:latin typeface="Calibri" pitchFamily="34" charset="0"/>
-                <a:ea typeface="Calibri" pitchFamily="34" charset="-122"/>
-                <a:cs typeface="Calibri" pitchFamily="34" charset="-120"/>
+                <a:latin typeface="Arial" pitchFamily="34" charset="0"/>
+                <a:ea typeface="Arial" pitchFamily="34" charset="-122"/>
+                <a:cs typeface="Arial" pitchFamily="34" charset="-120"/>
               </a:rPr>
               <a:t>во столько раз дороже привести нового гостя, чем вернуть прежнего</a:t>
             </a:r>
@@ -2619,9 +2619,9 @@
                 <a:solidFill>
                   <a:srgbClr val="E0A100"/>
                 </a:solidFill>
-                <a:latin typeface="Georgia" pitchFamily="34" charset="0"/>
-                <a:ea typeface="Georgia" pitchFamily="34" charset="-122"/>
-                <a:cs typeface="Georgia" pitchFamily="34" charset="-120"/>
+                <a:latin typeface="Bookman Old Style" pitchFamily="34" charset="0"/>
+                <a:ea typeface="Bookman Old Style" pitchFamily="34" charset="-122"/>
+                <a:cs typeface="Bookman Old Style" pitchFamily="34" charset="-120"/>
               </a:rPr>
               <a:t>+8%</a:t>
             </a:r>
@@ -2658,9 +2658,9 @@
                 <a:solidFill>
                   <a:srgbClr val="2A1620"/>
                 </a:solidFill>
-                <a:latin typeface="Calibri" pitchFamily="34" charset="0"/>
-                <a:ea typeface="Calibri" pitchFamily="34" charset="-122"/>
-                <a:cs typeface="Calibri" pitchFamily="34" charset="-120"/>
+                <a:latin typeface="Arial" pitchFamily="34" charset="0"/>
+                <a:ea typeface="Arial" pitchFamily="34" charset="-122"/>
+                <a:cs typeface="Arial" pitchFamily="34" charset="-120"/>
               </a:rPr>
               <a:t>рынок растёт за счёт среднего чека, а не за счёт потока гостей</a:t>
             </a:r>
@@ -2697,9 +2697,9 @@
                 <a:solidFill>
                   <a:srgbClr val="8A6B58"/>
                 </a:solidFill>
-                <a:latin typeface="Calibri" pitchFamily="34" charset="0"/>
-                <a:ea typeface="Calibri" pitchFamily="34" charset="-122"/>
-                <a:cs typeface="Calibri" pitchFamily="34" charset="-120"/>
+                <a:latin typeface="Arial" pitchFamily="34" charset="0"/>
+                <a:ea typeface="Arial" pitchFamily="34" charset="-122"/>
+                <a:cs typeface="Arial" pitchFamily="34" charset="-120"/>
               </a:rPr>
               <a:t>Вывод: рычаг роста — не скидка, а то, как устроено меню и что возвращает гостя.</a:t>
             </a:r>
@@ -2764,17 +2764,17 @@
               <a:buNone/>
             </a:pPr>
             <a:r>
-              <a:rPr lang="en-US" sz="1100" b="1" spc="300" kern="0" dirty="0">
+              <a:rPr lang="en-US" sz="1050" b="1" spc="340" kern="0" dirty="0">
                 <a:solidFill>
                   <a:srgbClr val="D5283A"/>
                 </a:solidFill>
-                <a:latin typeface="Calibri" pitchFamily="34" charset="0"/>
-                <a:ea typeface="Calibri" pitchFamily="34" charset="-122"/>
-                <a:cs typeface="Calibri" pitchFamily="34" charset="-120"/>
-              </a:rPr>
-              <a:t>ИНЖЕНЕРИЯ МЕНЮ</a:t>
-            </a:r>
-            <a:endParaRPr lang="en-US" sz="1100" dirty="0"/>
+                <a:latin typeface="Arial" pitchFamily="34" charset="0"/>
+                <a:ea typeface="Arial" pitchFamily="34" charset="-122"/>
+                <a:cs typeface="Arial" pitchFamily="34" charset="-120"/>
+              </a:rPr>
+              <a:t>◆  ИНЖЕНЕРИЯ МЕНЮ</a:t>
+            </a:r>
+            <a:endParaRPr lang="en-US" sz="1050" dirty="0"/>
           </a:p>
         </p:txBody>
       </p:sp>
@@ -2803,17 +2803,17 @@
               <a:buNone/>
             </a:pPr>
             <a:r>
-              <a:rPr lang="en-US" sz="3000" b="1" dirty="0">
+              <a:rPr lang="en-US" sz="3200" b="1" dirty="0">
                 <a:solidFill>
                   <a:srgbClr val="2A1620"/>
                 </a:solidFill>
-                <a:latin typeface="Georgia" pitchFamily="34" charset="0"/>
-                <a:ea typeface="Georgia" pitchFamily="34" charset="-122"/>
-                <a:cs typeface="Georgia" pitchFamily="34" charset="-120"/>
-              </a:rPr>
-              <a:t>Каждое блюдо попадает в один из четырёх квадратов</a:t>
-            </a:r>
-            <a:endParaRPr lang="en-US" sz="3000" dirty="0"/>
+                <a:latin typeface="Bookman Old Style" pitchFamily="34" charset="0"/>
+                <a:ea typeface="Bookman Old Style" pitchFamily="34" charset="-122"/>
+                <a:cs typeface="Bookman Old Style" pitchFamily="34" charset="-120"/>
+              </a:rPr>
+              <a:t>Четыре типа блюд в любом меню</a:t>
+            </a:r>
+            <a:endParaRPr lang="en-US" sz="3200" dirty="0"/>
           </a:p>
         </p:txBody>
       </p:sp>
@@ -2870,9 +2870,9 @@
                 <a:solidFill>
                   <a:srgbClr val="8A6B58"/>
                 </a:solidFill>
-                <a:latin typeface="Calibri" pitchFamily="34" charset="0"/>
-                <a:ea typeface="Calibri" pitchFamily="34" charset="-122"/>
-                <a:cs typeface="Calibri" pitchFamily="34" charset="-120"/>
+                <a:latin typeface="Arial" pitchFamily="34" charset="0"/>
+                <a:ea typeface="Arial" pitchFamily="34" charset="-122"/>
+                <a:cs typeface="Arial" pitchFamily="34" charset="-120"/>
               </a:rPr>
               <a:t>Разложите позиции по популярности и марже — и станет видно, что двигать в топ, что переписать, а что убрать.</a:t>
             </a:r>
@@ -2937,17 +2937,17 @@
               <a:buNone/>
             </a:pPr>
             <a:r>
-              <a:rPr lang="en-US" sz="1100" b="1" spc="300" kern="0" dirty="0">
+              <a:rPr lang="en-US" sz="1050" b="1" spc="340" kern="0" dirty="0">
                 <a:solidFill>
                   <a:srgbClr val="D5283A"/>
                 </a:solidFill>
-                <a:latin typeface="Calibri" pitchFamily="34" charset="0"/>
-                <a:ea typeface="Calibri" pitchFamily="34" charset="-122"/>
-                <a:cs typeface="Calibri" pitchFamily="34" charset="-120"/>
-              </a:rPr>
-              <a:t>КАК УСТРОЕНА ПРОДАЮЩАЯ ПОЗИЦИЯ</a:t>
-            </a:r>
-            <a:endParaRPr lang="en-US" sz="1100" dirty="0"/>
+                <a:latin typeface="Arial" pitchFamily="34" charset="0"/>
+                <a:ea typeface="Arial" pitchFamily="34" charset="-122"/>
+                <a:cs typeface="Arial" pitchFamily="34" charset="-120"/>
+              </a:rPr>
+              <a:t>◆  КАК УСТРОЕНА ПРОДАЮЩАЯ ПОЗИЦИЯ</a:t>
+            </a:r>
+            <a:endParaRPr lang="en-US" sz="1050" dirty="0"/>
           </a:p>
         </p:txBody>
       </p:sp>
@@ -2980,9 +2980,9 @@
                 <a:solidFill>
                   <a:srgbClr val="2A1620"/>
                 </a:solidFill>
-                <a:latin typeface="Georgia" pitchFamily="34" charset="0"/>
-                <a:ea typeface="Georgia" pitchFamily="34" charset="-122"/>
-                <a:cs typeface="Georgia" pitchFamily="34" charset="-120"/>
+                <a:latin typeface="Bookman Old Style" pitchFamily="34" charset="0"/>
+                <a:ea typeface="Bookman Old Style" pitchFamily="34" charset="-122"/>
+                <a:cs typeface="Bookman Old Style" pitchFamily="34" charset="-120"/>
               </a:rPr>
               <a:t>Блюдо продаёт описание, а не строчка в списке</a:t>
             </a:r>
@@ -3006,8 +3006,8 @@
         </p:blipFill>
         <p:spPr>
           <a:xfrm>
-            <a:off x="2651760" y="1783080"/>
-            <a:ext cx="6858000" cy="4251960"/>
+            <a:off x="1691640" y="2057400"/>
+            <a:ext cx="8778240" cy="4315968"/>
           </a:xfrm>
           <a:prstGeom prst="rect">
             <a:avLst/>
@@ -3071,17 +3071,17 @@
               <a:buNone/>
             </a:pPr>
             <a:r>
-              <a:rPr lang="en-US" sz="1100" b="1" spc="300" kern="0" dirty="0">
+              <a:rPr lang="en-US" sz="1050" b="1" spc="340" kern="0" dirty="0">
                 <a:solidFill>
                   <a:srgbClr val="D5283A"/>
                 </a:solidFill>
-                <a:latin typeface="Calibri" pitchFamily="34" charset="0"/>
-                <a:ea typeface="Calibri" pitchFamily="34" charset="-122"/>
-                <a:cs typeface="Calibri" pitchFamily="34" charset="-120"/>
-              </a:rPr>
-              <a:t>ЗАГРУЗКА ЗАЛА</a:t>
-            </a:r>
-            <a:endParaRPr lang="en-US" sz="1100" dirty="0"/>
+                <a:latin typeface="Arial" pitchFamily="34" charset="0"/>
+                <a:ea typeface="Arial" pitchFamily="34" charset="-122"/>
+                <a:cs typeface="Arial" pitchFamily="34" charset="-120"/>
+              </a:rPr>
+              <a:t>◆  ЗАГРУЗКА ЗАЛА</a:t>
+            </a:r>
+            <a:endParaRPr lang="en-US" sz="1050" dirty="0"/>
           </a:p>
         </p:txBody>
       </p:sp>
@@ -3114,9 +3114,9 @@
                 <a:solidFill>
                   <a:srgbClr val="2A1620"/>
                 </a:solidFill>
-                <a:latin typeface="Georgia" pitchFamily="34" charset="0"/>
-                <a:ea typeface="Georgia" pitchFamily="34" charset="-122"/>
-                <a:cs typeface="Georgia" pitchFamily="34" charset="-120"/>
+                <a:latin typeface="Bookman Old Style" pitchFamily="34" charset="0"/>
+                <a:ea typeface="Bookman Old Style" pitchFamily="34" charset="-122"/>
+                <a:cs typeface="Bookman Old Style" pitchFamily="34" charset="-120"/>
               </a:rPr>
               <a:t>Выходные кормят, будни съедают прибыль</a:t>
             </a:r>
@@ -3205,17 +3205,17 @@
               <a:buNone/>
             </a:pPr>
             <a:r>
-              <a:rPr lang="en-US" sz="1100" b="1" spc="300" kern="0" dirty="0">
+              <a:rPr lang="en-US" sz="1050" b="1" spc="340" kern="0" dirty="0">
                 <a:solidFill>
                   <a:srgbClr val="F2C14E"/>
                 </a:solidFill>
-                <a:latin typeface="Calibri" pitchFamily="34" charset="0"/>
-                <a:ea typeface="Calibri" pitchFamily="34" charset="-122"/>
-                <a:cs typeface="Calibri" pitchFamily="34" charset="-120"/>
-              </a:rPr>
-              <a:t>ЧТО ДЕЛАЕМ С БУДНЯМИ</a:t>
-            </a:r>
-            <a:endParaRPr lang="en-US" sz="1100" dirty="0"/>
+                <a:latin typeface="Arial" pitchFamily="34" charset="0"/>
+                <a:ea typeface="Arial" pitchFamily="34" charset="-122"/>
+                <a:cs typeface="Arial" pitchFamily="34" charset="-120"/>
+              </a:rPr>
+              <a:t>◆  ЧТО ДЕЛАЕМ С БУДНЯМИ</a:t>
+            </a:r>
+            <a:endParaRPr lang="en-US" sz="1050" dirty="0"/>
           </a:p>
         </p:txBody>
       </p:sp>
@@ -3248,9 +3248,9 @@
                 <a:solidFill>
                   <a:srgbClr val="FFFFFF"/>
                 </a:solidFill>
-                <a:latin typeface="Georgia" pitchFamily="34" charset="0"/>
-                <a:ea typeface="Georgia" pitchFamily="34" charset="-122"/>
-                <a:cs typeface="Georgia" pitchFamily="34" charset="-120"/>
+                <a:latin typeface="Bookman Old Style" pitchFamily="34" charset="0"/>
+                <a:ea typeface="Bookman Old Style" pitchFamily="34" charset="-122"/>
+                <a:cs typeface="Bookman Old Style" pitchFamily="34" charset="-120"/>
               </a:rPr>
               <a:t>Гостю нужен повод, а не скидка</a:t>
             </a:r>
@@ -3334,9 +3334,9 @@
                 <a:solidFill>
                   <a:srgbClr val="FFFFFF"/>
                 </a:solidFill>
-                <a:latin typeface="Georgia" pitchFamily="34" charset="0"/>
-                <a:ea typeface="Georgia" pitchFamily="34" charset="-122"/>
-                <a:cs typeface="Georgia" pitchFamily="34" charset="-120"/>
+                <a:latin typeface="Bookman Old Style" pitchFamily="34" charset="0"/>
+                <a:ea typeface="Bookman Old Style" pitchFamily="34" charset="-122"/>
+                <a:cs typeface="Bookman Old Style" pitchFamily="34" charset="-120"/>
               </a:rPr>
               <a:t>Бизнес-ланч с характером</a:t>
             </a:r>
@@ -3373,9 +3373,9 @@
                 <a:solidFill>
                   <a:srgbClr val="D8C1AE"/>
                 </a:solidFill>
-                <a:latin typeface="Calibri" pitchFamily="34" charset="0"/>
-                <a:ea typeface="Calibri" pitchFamily="34" charset="-122"/>
-                <a:cs typeface="Calibri" pitchFamily="34" charset="-120"/>
+                <a:latin typeface="Arial" pitchFamily="34" charset="0"/>
+                <a:ea typeface="Arial" pitchFamily="34" charset="-122"/>
+                <a:cs typeface="Arial" pitchFamily="34" charset="-120"/>
               </a:rPr>
               <a:t>Не «дёшево», а быстро и вкусно: фикс-меню на 3 позиции.</a:t>
             </a:r>
@@ -3459,9 +3459,9 @@
                 <a:solidFill>
                   <a:srgbClr val="FFFFFF"/>
                 </a:solidFill>
-                <a:latin typeface="Georgia" pitchFamily="34" charset="0"/>
-                <a:ea typeface="Georgia" pitchFamily="34" charset="-122"/>
-                <a:cs typeface="Georgia" pitchFamily="34" charset="-120"/>
+                <a:latin typeface="Bookman Old Style" pitchFamily="34" charset="0"/>
+                <a:ea typeface="Bookman Old Style" pitchFamily="34" charset="-122"/>
+                <a:cs typeface="Bookman Old Style" pitchFamily="34" charset="-120"/>
               </a:rPr>
               <a:t>Тематический вечер</a:t>
             </a:r>
@@ -3498,9 +3498,9 @@
                 <a:solidFill>
                   <a:srgbClr val="D8C1AE"/>
                 </a:solidFill>
-                <a:latin typeface="Calibri" pitchFamily="34" charset="0"/>
-                <a:ea typeface="Calibri" pitchFamily="34" charset="-122"/>
-                <a:cs typeface="Calibri" pitchFamily="34" charset="-120"/>
+                <a:latin typeface="Arial" pitchFamily="34" charset="0"/>
+                <a:ea typeface="Arial" pitchFamily="34" charset="-122"/>
+                <a:cs typeface="Arial" pitchFamily="34" charset="-120"/>
               </a:rPr>
               <a:t>Один вечер недели — свой формат: винный, семейный, тихий.</a:t>
             </a:r>
@@ -3584,9 +3584,9 @@
                 <a:solidFill>
                   <a:srgbClr val="FFFFFF"/>
                 </a:solidFill>
-                <a:latin typeface="Georgia" pitchFamily="34" charset="0"/>
-                <a:ea typeface="Georgia" pitchFamily="34" charset="-122"/>
-                <a:cs typeface="Georgia" pitchFamily="34" charset="-120"/>
+                <a:latin typeface="Bookman Old Style" pitchFamily="34" charset="0"/>
+                <a:ea typeface="Bookman Old Style" pitchFamily="34" charset="-122"/>
+                <a:cs typeface="Bookman Old Style" pitchFamily="34" charset="-120"/>
               </a:rPr>
               <a:t>Сезонное спецпредложение</a:t>
             </a:r>
@@ -3623,9 +3623,9 @@
                 <a:solidFill>
                   <a:srgbClr val="D8C1AE"/>
                 </a:solidFill>
-                <a:latin typeface="Calibri" pitchFamily="34" charset="0"/>
-                <a:ea typeface="Calibri" pitchFamily="34" charset="-122"/>
-                <a:cs typeface="Calibri" pitchFamily="34" charset="-120"/>
+                <a:latin typeface="Arial" pitchFamily="34" charset="0"/>
+                <a:ea typeface="Arial" pitchFamily="34" charset="-122"/>
+                <a:cs typeface="Arial" pitchFamily="34" charset="-120"/>
               </a:rPr>
               <a:t>Ограниченное по времени меню — причина прийти именно сейчас.</a:t>
             </a:r>
@@ -3709,9 +3709,9 @@
                 <a:solidFill>
                   <a:srgbClr val="FFFFFF"/>
                 </a:solidFill>
-                <a:latin typeface="Georgia" pitchFamily="34" charset="0"/>
-                <a:ea typeface="Georgia" pitchFamily="34" charset="-122"/>
-                <a:cs typeface="Georgia" pitchFamily="34" charset="-120"/>
+                <a:latin typeface="Bookman Old Style" pitchFamily="34" charset="0"/>
+                <a:ea typeface="Bookman Old Style" pitchFamily="34" charset="-122"/>
+                <a:cs typeface="Bookman Old Style" pitchFamily="34" charset="-120"/>
               </a:rPr>
               <a:t>Программа возврата</a:t>
             </a:r>
@@ -3748,9 +3748,9 @@
                 <a:solidFill>
                   <a:srgbClr val="D8C1AE"/>
                 </a:solidFill>
-                <a:latin typeface="Calibri" pitchFamily="34" charset="0"/>
-                <a:ea typeface="Calibri" pitchFamily="34" charset="-122"/>
-                <a:cs typeface="Calibri" pitchFamily="34" charset="-120"/>
+                <a:latin typeface="Arial" pitchFamily="34" charset="0"/>
+                <a:ea typeface="Arial" pitchFamily="34" charset="-122"/>
+                <a:cs typeface="Arial" pitchFamily="34" charset="-120"/>
               </a:rPr>
               <a:t>Персональный повод: любимое блюдо, бонус ко второму визиту.</a:t>
             </a:r>
@@ -3815,17 +3815,17 @@
               <a:buNone/>
             </a:pPr>
             <a:r>
-              <a:rPr lang="en-US" sz="1100" b="1" spc="300" kern="0" dirty="0">
+              <a:rPr lang="en-US" sz="1050" b="1" spc="340" kern="0" dirty="0">
                 <a:solidFill>
                   <a:srgbClr val="D5283A"/>
                 </a:solidFill>
-                <a:latin typeface="Calibri" pitchFamily="34" charset="0"/>
-                <a:ea typeface="Calibri" pitchFamily="34" charset="-122"/>
-                <a:cs typeface="Calibri" pitchFamily="34" charset="-120"/>
-              </a:rPr>
-              <a:t>ЭКОНОМИКА ВОЗВРАТА</a:t>
-            </a:r>
-            <a:endParaRPr lang="en-US" sz="1100" dirty="0"/>
+                <a:latin typeface="Arial" pitchFamily="34" charset="0"/>
+                <a:ea typeface="Arial" pitchFamily="34" charset="-122"/>
+                <a:cs typeface="Arial" pitchFamily="34" charset="-120"/>
+              </a:rPr>
+              <a:t>◆  ЭКОНОМИКА ВОЗВРАТА</a:t>
+            </a:r>
+            <a:endParaRPr lang="en-US" sz="1050" dirty="0"/>
           </a:p>
         </p:txBody>
       </p:sp>
@@ -3858,9 +3858,9 @@
                 <a:solidFill>
                   <a:srgbClr val="2A1620"/>
                 </a:solidFill>
-                <a:latin typeface="Georgia" pitchFamily="34" charset="0"/>
-                <a:ea typeface="Georgia" pitchFamily="34" charset="-122"/>
-                <a:cs typeface="Georgia" pitchFamily="34" charset="-120"/>
+                <a:latin typeface="Bookman Old Style" pitchFamily="34" charset="0"/>
+                <a:ea typeface="Bookman Old Style" pitchFamily="34" charset="-122"/>
+                <a:cs typeface="Bookman Old Style" pitchFamily="34" charset="-120"/>
               </a:rPr>
               <a:t>Прибыль живёт во втором визите</a:t>
             </a:r>
@@ -3884,8 +3884,8 @@
         </p:blipFill>
         <p:spPr>
           <a:xfrm>
-            <a:off x="6400800" y="1463040"/>
-            <a:ext cx="5120640" cy="3986784"/>
+            <a:off x="7040880" y="2057400"/>
+            <a:ext cx="4480560" cy="3483864"/>
           </a:xfrm>
           <a:prstGeom prst="rect">
             <a:avLst/>
@@ -3921,9 +3921,9 @@
                 <a:solidFill>
                   <a:srgbClr val="E0A100"/>
                 </a:solidFill>
-                <a:latin typeface="Georgia" pitchFamily="34" charset="0"/>
-                <a:ea typeface="Georgia" pitchFamily="34" charset="-122"/>
-                <a:cs typeface="Georgia" pitchFamily="34" charset="-120"/>
+                <a:latin typeface="Bookman Old Style" pitchFamily="34" charset="0"/>
+                <a:ea typeface="Bookman Old Style" pitchFamily="34" charset="-122"/>
+                <a:cs typeface="Bookman Old Style" pitchFamily="34" charset="-120"/>
               </a:rPr>
               <a:t>01</a:t>
             </a:r>
@@ -3960,9 +3960,9 @@
                 <a:solidFill>
                   <a:srgbClr val="2A1620"/>
                 </a:solidFill>
-                <a:latin typeface="Georgia" pitchFamily="34" charset="0"/>
-                <a:ea typeface="Georgia" pitchFamily="34" charset="-122"/>
-                <a:cs typeface="Georgia" pitchFamily="34" charset="-120"/>
+                <a:latin typeface="Bookman Old Style" pitchFamily="34" charset="0"/>
+                <a:ea typeface="Bookman Old Style" pitchFamily="34" charset="-122"/>
+                <a:cs typeface="Bookman Old Style" pitchFamily="34" charset="-120"/>
               </a:rPr>
               <a:t>Впечатление сильнее блюда</a:t>
             </a:r>
@@ -3999,9 +3999,9 @@
                 <a:solidFill>
                   <a:srgbClr val="8A6B58"/>
                 </a:solidFill>
-                <a:latin typeface="Calibri" pitchFamily="34" charset="0"/>
-                <a:ea typeface="Calibri" pitchFamily="34" charset="-122"/>
-                <a:cs typeface="Calibri" pitchFamily="34" charset="-120"/>
+                <a:latin typeface="Arial" pitchFamily="34" charset="0"/>
+                <a:ea typeface="Arial" pitchFamily="34" charset="-122"/>
+                <a:cs typeface="Arial" pitchFamily="34" charset="-120"/>
               </a:rPr>
               <a:t>Гость запоминает атмосферу и сервис — их и пересказывает друзьям.</a:t>
             </a:r>
@@ -4038,9 +4038,9 @@
                 <a:solidFill>
                   <a:srgbClr val="E0A100"/>
                 </a:solidFill>
-                <a:latin typeface="Georgia" pitchFamily="34" charset="0"/>
-                <a:ea typeface="Georgia" pitchFamily="34" charset="-122"/>
-                <a:cs typeface="Georgia" pitchFamily="34" charset="-120"/>
+                <a:latin typeface="Bookman Old Style" pitchFamily="34" charset="0"/>
+                <a:ea typeface="Bookman Old Style" pitchFamily="34" charset="-122"/>
+                <a:cs typeface="Bookman Old Style" pitchFamily="34" charset="-120"/>
               </a:rPr>
               <a:t>02</a:t>
             </a:r>
@@ -4077,9 +4077,9 @@
                 <a:solidFill>
                   <a:srgbClr val="2A1620"/>
                 </a:solidFill>
-                <a:latin typeface="Georgia" pitchFamily="34" charset="0"/>
-                <a:ea typeface="Georgia" pitchFamily="34" charset="-122"/>
-                <a:cs typeface="Georgia" pitchFamily="34" charset="-120"/>
+                <a:latin typeface="Bookman Old Style" pitchFamily="34" charset="0"/>
+                <a:ea typeface="Bookman Old Style" pitchFamily="34" charset="-122"/>
+                <a:cs typeface="Bookman Old Style" pitchFamily="34" charset="-120"/>
               </a:rPr>
               <a:t>Повод вернуться создаём сами</a:t>
             </a:r>
@@ -4116,9 +4116,9 @@
                 <a:solidFill>
                   <a:srgbClr val="8A6B58"/>
                 </a:solidFill>
-                <a:latin typeface="Calibri" pitchFamily="34" charset="0"/>
-                <a:ea typeface="Calibri" pitchFamily="34" charset="-122"/>
-                <a:cs typeface="Calibri" pitchFamily="34" charset="-120"/>
+                <a:latin typeface="Arial" pitchFamily="34" charset="0"/>
+                <a:ea typeface="Arial" pitchFamily="34" charset="-122"/>
+                <a:cs typeface="Arial" pitchFamily="34" charset="-120"/>
               </a:rPr>
               <a:t>Сезонное меню, событие, персональное предложение после визита.</a:t>
             </a:r>
@@ -4155,9 +4155,9 @@
                 <a:solidFill>
                   <a:srgbClr val="E0A100"/>
                 </a:solidFill>
-                <a:latin typeface="Georgia" pitchFamily="34" charset="0"/>
-                <a:ea typeface="Georgia" pitchFamily="34" charset="-122"/>
-                <a:cs typeface="Georgia" pitchFamily="34" charset="-120"/>
+                <a:latin typeface="Bookman Old Style" pitchFamily="34" charset="0"/>
+                <a:ea typeface="Bookman Old Style" pitchFamily="34" charset="-122"/>
+                <a:cs typeface="Bookman Old Style" pitchFamily="34" charset="-120"/>
               </a:rPr>
               <a:t>03</a:t>
             </a:r>
@@ -4194,9 +4194,9 @@
                 <a:solidFill>
                   <a:srgbClr val="2A1620"/>
                 </a:solidFill>
-                <a:latin typeface="Georgia" pitchFamily="34" charset="0"/>
-                <a:ea typeface="Georgia" pitchFamily="34" charset="-122"/>
-                <a:cs typeface="Georgia" pitchFamily="34" charset="-120"/>
+                <a:latin typeface="Bookman Old Style" pitchFamily="34" charset="0"/>
+                <a:ea typeface="Bookman Old Style" pitchFamily="34" charset="-122"/>
+                <a:cs typeface="Bookman Old Style" pitchFamily="34" charset="-120"/>
               </a:rPr>
               <a:t>Считаем частоту, а не охваты</a:t>
             </a:r>
@@ -4233,9 +4233,9 @@
                 <a:solidFill>
                   <a:srgbClr val="8A6B58"/>
                 </a:solidFill>
-                <a:latin typeface="Calibri" pitchFamily="34" charset="0"/>
-                <a:ea typeface="Calibri" pitchFamily="34" charset="-122"/>
-                <a:cs typeface="Calibri" pitchFamily="34" charset="-120"/>
+                <a:latin typeface="Arial" pitchFamily="34" charset="0"/>
+                <a:ea typeface="Arial" pitchFamily="34" charset="-122"/>
+                <a:cs typeface="Arial" pitchFamily="34" charset="-120"/>
               </a:rPr>
               <a:t>Ключевые метрики — возврат гостя, частота визитов и средний чек.</a:t>
             </a:r>
@@ -4300,17 +4300,17 @@
               <a:buNone/>
             </a:pPr>
             <a:r>
-              <a:rPr lang="en-US" sz="1100" b="1" spc="300" kern="0" dirty="0">
+              <a:rPr lang="en-US" sz="1050" b="1" spc="340" kern="0" dirty="0">
                 <a:solidFill>
                   <a:srgbClr val="D5283A"/>
                 </a:solidFill>
-                <a:latin typeface="Calibri" pitchFamily="34" charset="0"/>
-                <a:ea typeface="Calibri" pitchFamily="34" charset="-122"/>
-                <a:cs typeface="Calibri" pitchFamily="34" charset="-120"/>
-              </a:rPr>
-              <a:t>РЕЗУЛЬТАТ</a:t>
-            </a:r>
-            <a:endParaRPr lang="en-US" sz="1100" dirty="0"/>
+                <a:latin typeface="Arial" pitchFamily="34" charset="0"/>
+                <a:ea typeface="Arial" pitchFamily="34" charset="-122"/>
+                <a:cs typeface="Arial" pitchFamily="34" charset="-120"/>
+              </a:rPr>
+              <a:t>◆  РЕЗУЛЬТАТ</a:t>
+            </a:r>
+            <a:endParaRPr lang="en-US" sz="1050" dirty="0"/>
           </a:p>
         </p:txBody>
       </p:sp>
@@ -4343,9 +4343,9 @@
                 <a:solidFill>
                   <a:srgbClr val="2A1620"/>
                 </a:solidFill>
-                <a:latin typeface="Georgia" pitchFamily="34" charset="0"/>
-                <a:ea typeface="Georgia" pitchFamily="34" charset="-122"/>
-                <a:cs typeface="Georgia" pitchFamily="34" charset="-120"/>
+                <a:latin typeface="Bookman Old Style" pitchFamily="34" charset="0"/>
+                <a:ea typeface="Bookman Old Style" pitchFamily="34" charset="-122"/>
+                <a:cs typeface="Bookman Old Style" pitchFamily="34" charset="-120"/>
               </a:rPr>
               <a:t>Что меняется после работы с меню</a:t>
             </a:r>
@@ -4382,9 +4382,9 @@
                 <a:solidFill>
                   <a:srgbClr val="8A6B58"/>
                 </a:solidFill>
-                <a:latin typeface="Calibri" pitchFamily="34" charset="0"/>
-                <a:ea typeface="Calibri" pitchFamily="34" charset="-122"/>
-                <a:cs typeface="Calibri" pitchFamily="34" charset="-120"/>
+                <a:latin typeface="Arial" pitchFamily="34" charset="0"/>
+                <a:ea typeface="Arial" pitchFamily="34" charset="-122"/>
+                <a:cs typeface="Arial" pitchFamily="34" charset="-120"/>
               </a:rPr>
               <a:t>Средний чек растёт за счёт структуры меню и допозиций, а не повышения цен.</a:t>
             </a:r>
@@ -4408,8 +4408,8 @@
         </p:blipFill>
         <p:spPr>
           <a:xfrm>
-            <a:off x="5943600" y="1536192"/>
-            <a:ext cx="5669280" cy="3191256"/>
+            <a:off x="6400800" y="2011680"/>
+            <a:ext cx="5120640" cy="2880360"/>
           </a:xfrm>
           <a:prstGeom prst="rect">
             <a:avLst/>
@@ -4445,9 +4445,9 @@
                 <a:solidFill>
                   <a:srgbClr val="D5283A"/>
                 </a:solidFill>
-                <a:latin typeface="Georgia" pitchFamily="34" charset="0"/>
-                <a:ea typeface="Georgia" pitchFamily="34" charset="-122"/>
-                <a:cs typeface="Georgia" pitchFamily="34" charset="-120"/>
+                <a:latin typeface="Bookman Old Style" pitchFamily="34" charset="0"/>
+                <a:ea typeface="Bookman Old Style" pitchFamily="34" charset="-122"/>
+                <a:cs typeface="Bookman Old Style" pitchFamily="34" charset="-120"/>
               </a:rPr>
               <a:t>+27%</a:t>
             </a:r>
@@ -4484,9 +4484,9 @@
                 <a:solidFill>
                   <a:srgbClr val="8A6B58"/>
                 </a:solidFill>
-                <a:latin typeface="Calibri" pitchFamily="34" charset="0"/>
-                <a:ea typeface="Calibri" pitchFamily="34" charset="-122"/>
-                <a:cs typeface="Calibri" pitchFamily="34" charset="-120"/>
+                <a:latin typeface="Arial" pitchFamily="34" charset="0"/>
+                <a:ea typeface="Arial" pitchFamily="34" charset="-122"/>
+                <a:cs typeface="Arial" pitchFamily="34" charset="-120"/>
               </a:rPr>
               <a:t>к среднему чеку</a:t>
             </a:r>
@@ -4523,9 +4523,9 @@
                 <a:solidFill>
                   <a:srgbClr val="D5283A"/>
                 </a:solidFill>
-                <a:latin typeface="Georgia" pitchFamily="34" charset="0"/>
-                <a:ea typeface="Georgia" pitchFamily="34" charset="-122"/>
-                <a:cs typeface="Georgia" pitchFamily="34" charset="-120"/>
+                <a:latin typeface="Bookman Old Style" pitchFamily="34" charset="0"/>
+                <a:ea typeface="Bookman Old Style" pitchFamily="34" charset="-122"/>
+                <a:cs typeface="Bookman Old Style" pitchFamily="34" charset="-120"/>
               </a:rPr>
               <a:t>+40%</a:t>
             </a:r>
@@ -4562,9 +4562,9 @@
                 <a:solidFill>
                   <a:srgbClr val="8A6B58"/>
                 </a:solidFill>
-                <a:latin typeface="Calibri" pitchFamily="34" charset="0"/>
-                <a:ea typeface="Calibri" pitchFamily="34" charset="-122"/>
-                <a:cs typeface="Calibri" pitchFamily="34" charset="-120"/>
+                <a:latin typeface="Arial" pitchFamily="34" charset="0"/>
+                <a:ea typeface="Arial" pitchFamily="34" charset="-122"/>
+                <a:cs typeface="Arial" pitchFamily="34" charset="-120"/>
               </a:rPr>
               <a:t>загрузка в будни</a:t>
             </a:r>
@@ -4601,9 +4601,9 @@
                 <a:solidFill>
                   <a:srgbClr val="D5283A"/>
                 </a:solidFill>
-                <a:latin typeface="Georgia" pitchFamily="34" charset="0"/>
-                <a:ea typeface="Georgia" pitchFamily="34" charset="-122"/>
-                <a:cs typeface="Georgia" pitchFamily="34" charset="-120"/>
+                <a:latin typeface="Bookman Old Style" pitchFamily="34" charset="0"/>
+                <a:ea typeface="Bookman Old Style" pitchFamily="34" charset="-122"/>
+                <a:cs typeface="Bookman Old Style" pitchFamily="34" charset="-120"/>
               </a:rPr>
               <a:t>×2</a:t>
             </a:r>
@@ -4640,9 +4640,9 @@
                 <a:solidFill>
                   <a:srgbClr val="8A6B58"/>
                 </a:solidFill>
-                <a:latin typeface="Calibri" pitchFamily="34" charset="0"/>
-                <a:ea typeface="Calibri" pitchFamily="34" charset="-122"/>
-                <a:cs typeface="Calibri" pitchFamily="34" charset="-120"/>
+                <a:latin typeface="Arial" pitchFamily="34" charset="0"/>
+                <a:ea typeface="Arial" pitchFamily="34" charset="-122"/>
+                <a:cs typeface="Arial" pitchFamily="34" charset="-120"/>
               </a:rPr>
               <a:t>частота повторных визитов</a:t>
             </a:r>
@@ -4701,9 +4701,9 @@
                 <a:solidFill>
                   <a:srgbClr val="2A1620"/>
                 </a:solidFill>
-                <a:latin typeface="Calibri" pitchFamily="34" charset="0"/>
-                <a:ea typeface="Calibri" pitchFamily="34" charset="-122"/>
-                <a:cs typeface="Calibri" pitchFamily="34" charset="-120"/>
+                <a:latin typeface="Arial" pitchFamily="34" charset="0"/>
+                <a:ea typeface="Arial" pitchFamily="34" charset="-122"/>
+                <a:cs typeface="Arial" pitchFamily="34" charset="-120"/>
               </a:rPr>
               <a:t>Цены в прайсе остались прежними — изменились структура меню, описания и поводы вернуться.</a:t>
             </a:r>
@@ -4768,17 +4768,17 @@
               <a:buNone/>
             </a:pPr>
             <a:r>
-              <a:rPr lang="en-US" sz="1100" b="1" spc="300" kern="0" dirty="0">
+              <a:rPr lang="en-US" sz="1050" b="1" spc="340" kern="0" dirty="0">
                 <a:solidFill>
                   <a:srgbClr val="D5283A"/>
                 </a:solidFill>
-                <a:latin typeface="Calibri" pitchFamily="34" charset="0"/>
-                <a:ea typeface="Calibri" pitchFamily="34" charset="-122"/>
-                <a:cs typeface="Calibri" pitchFamily="34" charset="-120"/>
-              </a:rPr>
-              <a:t>ЧТО ВХОДИТ В РАБОТУ</a:t>
-            </a:r>
-            <a:endParaRPr lang="en-US" sz="1100" dirty="0"/>
+                <a:latin typeface="Arial" pitchFamily="34" charset="0"/>
+                <a:ea typeface="Arial" pitchFamily="34" charset="-122"/>
+                <a:cs typeface="Arial" pitchFamily="34" charset="-120"/>
+              </a:rPr>
+              <a:t>◆  ЧТО ВХОДИТ В РАБОТУ</a:t>
+            </a:r>
+            <a:endParaRPr lang="en-US" sz="1050" dirty="0"/>
           </a:p>
         </p:txBody>
       </p:sp>
@@ -4811,9 +4811,9 @@
                 <a:solidFill>
                   <a:srgbClr val="2A1620"/>
                 </a:solidFill>
-                <a:latin typeface="Georgia" pitchFamily="34" charset="0"/>
-                <a:ea typeface="Georgia" pitchFamily="34" charset="-122"/>
-                <a:cs typeface="Georgia" pitchFamily="34" charset="-120"/>
+                <a:latin typeface="Bookman Old Style" pitchFamily="34" charset="0"/>
+                <a:ea typeface="Bookman Old Style" pitchFamily="34" charset="-122"/>
+                <a:cs typeface="Bookman Old Style" pitchFamily="34" charset="-120"/>
               </a:rPr>
               <a:t>От аудита меню до готовых материалов</a:t>
             </a:r>
@@ -4823,30 +4823,42 @@
       </p:sp>
       <p:sp>
         <p:nvSpPr>
-          <p:cNvPr id="4" name="Shape 2"/>
-          <p:cNvSpPr/>
-          <p:nvPr/>
-        </p:nvSpPr>
-        <p:spPr>
-          <a:xfrm>
-            <a:off x="658368" y="1783080"/>
-            <a:ext cx="10874959" cy="749808"/>
-          </a:xfrm>
-          <a:prstGeom prst="roundRect">
-            <a:avLst>
-              <a:gd name="adj" fmla="val 12195"/>
-            </a:avLst>
-          </a:prstGeom>
-          <a:solidFill>
-            <a:srgbClr val="FFFFFF"/>
-          </a:solidFill>
-          <a:ln w="12700">
-            <a:solidFill>
-              <a:srgbClr val="E8D6C0"/>
-            </a:solidFill>
-            <a:prstDash val="solid"/>
-          </a:ln>
-        </p:spPr>
+          <p:cNvPr id="4" name="Text 2"/>
+          <p:cNvSpPr/>
+          <p:nvPr/>
+        </p:nvSpPr>
+        <p:spPr>
+          <a:xfrm>
+            <a:off x="658368" y="1874520"/>
+            <a:ext cx="548640" cy="457200"/>
+          </a:xfrm>
+          <a:prstGeom prst="rect">
+            <a:avLst/>
+          </a:prstGeom>
+          <a:noFill/>
+          <a:ln/>
+        </p:spPr>
+        <p:txBody>
+          <a:bodyPr wrap="square" lIns="0" tIns="0" rIns="0" bIns="0" rtlCol="0" anchor="ctr"/>
+          <a:lstStyle/>
+          <a:p>
+            <a:pPr indent="0" marL="0">
+              <a:buNone/>
+            </a:pPr>
+            <a:r>
+              <a:rPr lang="en-US" sz="1600" b="1" dirty="0">
+                <a:solidFill>
+                  <a:srgbClr val="E0A100"/>
+                </a:solidFill>
+                <a:latin typeface="Bookman Old Style" pitchFamily="34" charset="0"/>
+                <a:ea typeface="Bookman Old Style" pitchFamily="34" charset="-122"/>
+                <a:cs typeface="Bookman Old Style" pitchFamily="34" charset="-120"/>
+              </a:rPr>
+              <a:t>01</a:t>
+            </a:r>
+            <a:endParaRPr lang="en-US" sz="1600" dirty="0"/>
+          </a:p>
+        </p:txBody>
       </p:sp>
       <p:sp>
         <p:nvSpPr>
@@ -4856,34 +4868,34 @@
         </p:nvSpPr>
         <p:spPr>
           <a:xfrm>
-            <a:off x="886968" y="1783080"/>
-            <a:ext cx="457200" cy="749808"/>
-          </a:xfrm>
-          <a:prstGeom prst="rect">
-            <a:avLst/>
-          </a:prstGeom>
-          <a:noFill/>
-          <a:ln/>
-        </p:spPr>
-        <p:txBody>
-          <a:bodyPr wrap="square" lIns="0" tIns="0" rIns="0" bIns="0" rtlCol="0" anchor="ctr"/>
-          <a:lstStyle/>
-          <a:p>
-            <a:pPr algn="ctr" indent="0" marL="0">
-              <a:buNone/>
-            </a:pPr>
-            <a:r>
-              <a:rPr lang="en-US" sz="1700" b="1" dirty="0">
-                <a:solidFill>
-                  <a:srgbClr val="4B7F52"/>
-                </a:solidFill>
-                <a:latin typeface="Calibri" pitchFamily="34" charset="0"/>
-                <a:ea typeface="Calibri" pitchFamily="34" charset="-122"/>
-                <a:cs typeface="Calibri" pitchFamily="34" charset="-120"/>
-              </a:rPr>
-              <a:t>✓</a:t>
-            </a:r>
-            <a:endParaRPr lang="en-US" sz="1700" dirty="0"/>
+            <a:off x="1252728" y="1874520"/>
+            <a:ext cx="3474720" cy="457200"/>
+          </a:xfrm>
+          <a:prstGeom prst="rect">
+            <a:avLst/>
+          </a:prstGeom>
+          <a:noFill/>
+          <a:ln/>
+        </p:spPr>
+        <p:txBody>
+          <a:bodyPr wrap="square" lIns="0" tIns="0" rIns="0" bIns="0" rtlCol="0" anchor="ctr"/>
+          <a:lstStyle/>
+          <a:p>
+            <a:pPr indent="0" marL="0">
+              <a:buNone/>
+            </a:pPr>
+            <a:r>
+              <a:rPr lang="en-US" sz="1800" b="1" dirty="0">
+                <a:solidFill>
+                  <a:srgbClr val="2A1620"/>
+                </a:solidFill>
+                <a:latin typeface="Bookman Old Style" pitchFamily="34" charset="0"/>
+                <a:ea typeface="Bookman Old Style" pitchFamily="34" charset="-122"/>
+                <a:cs typeface="Bookman Old Style" pitchFamily="34" charset="-120"/>
+              </a:rPr>
+              <a:t>Аудит меню</a:t>
+            </a:r>
+            <a:endParaRPr lang="en-US" sz="1800" dirty="0"/>
           </a:p>
         </p:txBody>
       </p:sp>
@@ -4895,454 +4907,697 @@
         </p:nvSpPr>
         <p:spPr>
           <a:xfrm>
-            <a:off x="1435608" y="1783080"/>
-            <a:ext cx="9692640" cy="749808"/>
-          </a:xfrm>
-          <a:prstGeom prst="rect">
-            <a:avLst/>
-          </a:prstGeom>
-          <a:noFill/>
-          <a:ln/>
-        </p:spPr>
-        <p:txBody>
-          <a:bodyPr wrap="square" lIns="0" tIns="0" rIns="0" bIns="0" rtlCol="0" anchor="ctr"/>
-          <a:lstStyle/>
-          <a:p>
-            <a:pPr indent="0" marL="0">
-              <a:buNone/>
-            </a:pPr>
-            <a:r>
-              <a:rPr lang="en-US" sz="1550" dirty="0">
+            <a:off x="4206240" y="2002536"/>
+            <a:ext cx="3291840" cy="365760"/>
+          </a:xfrm>
+          <a:prstGeom prst="rect">
+            <a:avLst/>
+          </a:prstGeom>
+          <a:noFill/>
+          <a:ln/>
+        </p:spPr>
+        <p:txBody>
+          <a:bodyPr wrap="square" lIns="0" tIns="0" rIns="0" bIns="0" rtlCol="0" anchor="ctr"/>
+          <a:lstStyle/>
+          <a:p>
+            <a:pPr indent="0" marL="0">
+              <a:buNone/>
+            </a:pPr>
+            <a:r>
+              <a:rPr lang="en-US" sz="1200" dirty="0">
+                <a:solidFill>
+                  <a:srgbClr val="E8D6C0"/>
+                </a:solidFill>
+                <a:latin typeface="Arial" pitchFamily="34" charset="0"/>
+                <a:ea typeface="Arial" pitchFamily="34" charset="-122"/>
+                <a:cs typeface="Arial" pitchFamily="34" charset="-120"/>
+              </a:rPr>
+              <a:t>..........................................................</a:t>
+            </a:r>
+            <a:endParaRPr lang="en-US" sz="1200" dirty="0"/>
+          </a:p>
+        </p:txBody>
+      </p:sp>
+      <p:sp>
+        <p:nvSpPr>
+          <p:cNvPr id="7" name="Text 5"/>
+          <p:cNvSpPr/>
+          <p:nvPr/>
+        </p:nvSpPr>
+        <p:spPr>
+          <a:xfrm>
+            <a:off x="7589520" y="1874520"/>
+            <a:ext cx="3931920" cy="457200"/>
+          </a:xfrm>
+          <a:prstGeom prst="rect">
+            <a:avLst/>
+          </a:prstGeom>
+          <a:noFill/>
+          <a:ln/>
+        </p:spPr>
+        <p:txBody>
+          <a:bodyPr wrap="square" lIns="0" tIns="0" rIns="0" bIns="0" rtlCol="0" anchor="ctr"/>
+          <a:lstStyle/>
+          <a:p>
+            <a:pPr algn="r" indent="0" marL="0">
+              <a:buNone/>
+            </a:pPr>
+            <a:r>
+              <a:rPr lang="en-US" sz="1400" dirty="0">
+                <a:solidFill>
+                  <a:srgbClr val="8A6B58"/>
+                </a:solidFill>
+                <a:latin typeface="Arial" pitchFamily="34" charset="0"/>
+                <a:ea typeface="Arial" pitchFamily="34" charset="-122"/>
+                <a:cs typeface="Arial" pitchFamily="34" charset="-120"/>
+              </a:rPr>
+              <a:t>матрица позиций по марже и спросу</a:t>
+            </a:r>
+            <a:endParaRPr lang="en-US" sz="1400" dirty="0"/>
+          </a:p>
+        </p:txBody>
+      </p:sp>
+      <p:sp>
+        <p:nvSpPr>
+          <p:cNvPr id="8" name="Text 6"/>
+          <p:cNvSpPr/>
+          <p:nvPr/>
+        </p:nvSpPr>
+        <p:spPr>
+          <a:xfrm>
+            <a:off x="658368" y="2660904"/>
+            <a:ext cx="548640" cy="457200"/>
+          </a:xfrm>
+          <a:prstGeom prst="rect">
+            <a:avLst/>
+          </a:prstGeom>
+          <a:noFill/>
+          <a:ln/>
+        </p:spPr>
+        <p:txBody>
+          <a:bodyPr wrap="square" lIns="0" tIns="0" rIns="0" bIns="0" rtlCol="0" anchor="ctr"/>
+          <a:lstStyle/>
+          <a:p>
+            <a:pPr indent="0" marL="0">
+              <a:buNone/>
+            </a:pPr>
+            <a:r>
+              <a:rPr lang="en-US" sz="1600" b="1" dirty="0">
+                <a:solidFill>
+                  <a:srgbClr val="E0A100"/>
+                </a:solidFill>
+                <a:latin typeface="Bookman Old Style" pitchFamily="34" charset="0"/>
+                <a:ea typeface="Bookman Old Style" pitchFamily="34" charset="-122"/>
+                <a:cs typeface="Bookman Old Style" pitchFamily="34" charset="-120"/>
+              </a:rPr>
+              <a:t>02</a:t>
+            </a:r>
+            <a:endParaRPr lang="en-US" sz="1600" dirty="0"/>
+          </a:p>
+        </p:txBody>
+      </p:sp>
+      <p:sp>
+        <p:nvSpPr>
+          <p:cNvPr id="9" name="Text 7"/>
+          <p:cNvSpPr/>
+          <p:nvPr/>
+        </p:nvSpPr>
+        <p:spPr>
+          <a:xfrm>
+            <a:off x="1252728" y="2660904"/>
+            <a:ext cx="3474720" cy="457200"/>
+          </a:xfrm>
+          <a:prstGeom prst="rect">
+            <a:avLst/>
+          </a:prstGeom>
+          <a:noFill/>
+          <a:ln/>
+        </p:spPr>
+        <p:txBody>
+          <a:bodyPr wrap="square" lIns="0" tIns="0" rIns="0" bIns="0" rtlCol="0" anchor="ctr"/>
+          <a:lstStyle/>
+          <a:p>
+            <a:pPr indent="0" marL="0">
+              <a:buNone/>
+            </a:pPr>
+            <a:r>
+              <a:rPr lang="en-US" sz="1800" b="1" dirty="0">
                 <a:solidFill>
                   <a:srgbClr val="2A1620"/>
                 </a:solidFill>
-                <a:latin typeface="Calibri" pitchFamily="34" charset="0"/>
-                <a:ea typeface="Calibri" pitchFamily="34" charset="-122"/>
-                <a:cs typeface="Calibri" pitchFamily="34" charset="-120"/>
-              </a:rPr>
-              <a:t>Аудит меню: матрица позиций по марже и спросу</a:t>
-            </a:r>
-            <a:endParaRPr lang="en-US" sz="1550" dirty="0"/>
-          </a:p>
-        </p:txBody>
-      </p:sp>
-      <p:sp>
-        <p:nvSpPr>
-          <p:cNvPr id="7" name="Shape 5"/>
-          <p:cNvSpPr/>
-          <p:nvPr/>
-        </p:nvSpPr>
-        <p:spPr>
-          <a:xfrm>
-            <a:off x="658368" y="2679192"/>
-            <a:ext cx="10874959" cy="749808"/>
-          </a:xfrm>
-          <a:prstGeom prst="roundRect">
-            <a:avLst>
-              <a:gd name="adj" fmla="val 12195"/>
-            </a:avLst>
-          </a:prstGeom>
-          <a:solidFill>
-            <a:srgbClr val="FFFFFF"/>
-          </a:solidFill>
-          <a:ln w="12700">
-            <a:solidFill>
-              <a:srgbClr val="E8D6C0"/>
-            </a:solidFill>
-            <a:prstDash val="solid"/>
-          </a:ln>
-        </p:spPr>
-      </p:sp>
-      <p:sp>
-        <p:nvSpPr>
-          <p:cNvPr id="8" name="Text 6"/>
-          <p:cNvSpPr/>
-          <p:nvPr/>
-        </p:nvSpPr>
-        <p:spPr>
-          <a:xfrm>
-            <a:off x="886968" y="2679192"/>
-            <a:ext cx="457200" cy="749808"/>
-          </a:xfrm>
-          <a:prstGeom prst="rect">
-            <a:avLst/>
-          </a:prstGeom>
-          <a:noFill/>
-          <a:ln/>
-        </p:spPr>
-        <p:txBody>
-          <a:bodyPr wrap="square" lIns="0" tIns="0" rIns="0" bIns="0" rtlCol="0" anchor="ctr"/>
-          <a:lstStyle/>
-          <a:p>
-            <a:pPr algn="ctr" indent="0" marL="0">
-              <a:buNone/>
-            </a:pPr>
-            <a:r>
-              <a:rPr lang="en-US" sz="1700" b="1" dirty="0">
-                <a:solidFill>
-                  <a:srgbClr val="4B7F52"/>
-                </a:solidFill>
-                <a:latin typeface="Calibri" pitchFamily="34" charset="0"/>
-                <a:ea typeface="Calibri" pitchFamily="34" charset="-122"/>
-                <a:cs typeface="Calibri" pitchFamily="34" charset="-120"/>
-              </a:rPr>
-              <a:t>✓</a:t>
-            </a:r>
-            <a:endParaRPr lang="en-US" sz="1700" dirty="0"/>
-          </a:p>
-        </p:txBody>
-      </p:sp>
-      <p:sp>
-        <p:nvSpPr>
-          <p:cNvPr id="9" name="Text 7"/>
-          <p:cNvSpPr/>
-          <p:nvPr/>
-        </p:nvSpPr>
-        <p:spPr>
-          <a:xfrm>
-            <a:off x="1435608" y="2679192"/>
-            <a:ext cx="9692640" cy="749808"/>
-          </a:xfrm>
-          <a:prstGeom prst="rect">
-            <a:avLst/>
-          </a:prstGeom>
-          <a:noFill/>
-          <a:ln/>
-        </p:spPr>
-        <p:txBody>
-          <a:bodyPr wrap="square" lIns="0" tIns="0" rIns="0" bIns="0" rtlCol="0" anchor="ctr"/>
-          <a:lstStyle/>
-          <a:p>
-            <a:pPr indent="0" marL="0">
-              <a:buNone/>
-            </a:pPr>
-            <a:r>
-              <a:rPr lang="en-US" sz="1550" dirty="0">
+                <a:latin typeface="Bookman Old Style" pitchFamily="34" charset="0"/>
+                <a:ea typeface="Bookman Old Style" pitchFamily="34" charset="-122"/>
+                <a:cs typeface="Bookman Old Style" pitchFamily="34" charset="-120"/>
+              </a:rPr>
+              <a:t>Тексты</a:t>
+            </a:r>
+            <a:endParaRPr lang="en-US" sz="1800" dirty="0"/>
+          </a:p>
+        </p:txBody>
+      </p:sp>
+      <p:sp>
+        <p:nvSpPr>
+          <p:cNvPr id="10" name="Text 8"/>
+          <p:cNvSpPr/>
+          <p:nvPr/>
+        </p:nvSpPr>
+        <p:spPr>
+          <a:xfrm>
+            <a:off x="4206240" y="2788920"/>
+            <a:ext cx="3291840" cy="365760"/>
+          </a:xfrm>
+          <a:prstGeom prst="rect">
+            <a:avLst/>
+          </a:prstGeom>
+          <a:noFill/>
+          <a:ln/>
+        </p:spPr>
+        <p:txBody>
+          <a:bodyPr wrap="square" lIns="0" tIns="0" rIns="0" bIns="0" rtlCol="0" anchor="ctr"/>
+          <a:lstStyle/>
+          <a:p>
+            <a:pPr indent="0" marL="0">
+              <a:buNone/>
+            </a:pPr>
+            <a:r>
+              <a:rPr lang="en-US" sz="1200" dirty="0">
+                <a:solidFill>
+                  <a:srgbClr val="E8D6C0"/>
+                </a:solidFill>
+                <a:latin typeface="Arial" pitchFamily="34" charset="0"/>
+                <a:ea typeface="Arial" pitchFamily="34" charset="-122"/>
+                <a:cs typeface="Arial" pitchFamily="34" charset="-120"/>
+              </a:rPr>
+              <a:t>..........................................................</a:t>
+            </a:r>
+            <a:endParaRPr lang="en-US" sz="1200" dirty="0"/>
+          </a:p>
+        </p:txBody>
+      </p:sp>
+      <p:sp>
+        <p:nvSpPr>
+          <p:cNvPr id="11" name="Text 9"/>
+          <p:cNvSpPr/>
+          <p:nvPr/>
+        </p:nvSpPr>
+        <p:spPr>
+          <a:xfrm>
+            <a:off x="7589520" y="2660904"/>
+            <a:ext cx="3931920" cy="457200"/>
+          </a:xfrm>
+          <a:prstGeom prst="rect">
+            <a:avLst/>
+          </a:prstGeom>
+          <a:noFill/>
+          <a:ln/>
+        </p:spPr>
+        <p:txBody>
+          <a:bodyPr wrap="square" lIns="0" tIns="0" rIns="0" bIns="0" rtlCol="0" anchor="ctr"/>
+          <a:lstStyle/>
+          <a:p>
+            <a:pPr algn="r" indent="0" marL="0">
+              <a:buNone/>
+            </a:pPr>
+            <a:r>
+              <a:rPr lang="en-US" sz="1400" dirty="0">
+                <a:solidFill>
+                  <a:srgbClr val="8A6B58"/>
+                </a:solidFill>
+                <a:latin typeface="Arial" pitchFamily="34" charset="0"/>
+                <a:ea typeface="Arial" pitchFamily="34" charset="-122"/>
+                <a:cs typeface="Arial" pitchFamily="34" charset="-120"/>
+              </a:rPr>
+              <a:t>описания блюд и названия разделов</a:t>
+            </a:r>
+            <a:endParaRPr lang="en-US" sz="1400" dirty="0"/>
+          </a:p>
+        </p:txBody>
+      </p:sp>
+      <p:sp>
+        <p:nvSpPr>
+          <p:cNvPr id="12" name="Text 10"/>
+          <p:cNvSpPr/>
+          <p:nvPr/>
+        </p:nvSpPr>
+        <p:spPr>
+          <a:xfrm>
+            <a:off x="658368" y="3447288"/>
+            <a:ext cx="548640" cy="457200"/>
+          </a:xfrm>
+          <a:prstGeom prst="rect">
+            <a:avLst/>
+          </a:prstGeom>
+          <a:noFill/>
+          <a:ln/>
+        </p:spPr>
+        <p:txBody>
+          <a:bodyPr wrap="square" lIns="0" tIns="0" rIns="0" bIns="0" rtlCol="0" anchor="ctr"/>
+          <a:lstStyle/>
+          <a:p>
+            <a:pPr indent="0" marL="0">
+              <a:buNone/>
+            </a:pPr>
+            <a:r>
+              <a:rPr lang="en-US" sz="1600" b="1" dirty="0">
+                <a:solidFill>
+                  <a:srgbClr val="E0A100"/>
+                </a:solidFill>
+                <a:latin typeface="Bookman Old Style" pitchFamily="34" charset="0"/>
+                <a:ea typeface="Bookman Old Style" pitchFamily="34" charset="-122"/>
+                <a:cs typeface="Bookman Old Style" pitchFamily="34" charset="-120"/>
+              </a:rPr>
+              <a:t>03</a:t>
+            </a:r>
+            <a:endParaRPr lang="en-US" sz="1600" dirty="0"/>
+          </a:p>
+        </p:txBody>
+      </p:sp>
+      <p:sp>
+        <p:nvSpPr>
+          <p:cNvPr id="13" name="Text 11"/>
+          <p:cNvSpPr/>
+          <p:nvPr/>
+        </p:nvSpPr>
+        <p:spPr>
+          <a:xfrm>
+            <a:off x="1252728" y="3447288"/>
+            <a:ext cx="3474720" cy="457200"/>
+          </a:xfrm>
+          <a:prstGeom prst="rect">
+            <a:avLst/>
+          </a:prstGeom>
+          <a:noFill/>
+          <a:ln/>
+        </p:spPr>
+        <p:txBody>
+          <a:bodyPr wrap="square" lIns="0" tIns="0" rIns="0" bIns="0" rtlCol="0" anchor="ctr"/>
+          <a:lstStyle/>
+          <a:p>
+            <a:pPr indent="0" marL="0">
+              <a:buNone/>
+            </a:pPr>
+            <a:r>
+              <a:rPr lang="en-US" sz="1800" b="1" dirty="0">
                 <a:solidFill>
                   <a:srgbClr val="2A1620"/>
                 </a:solidFill>
-                <a:latin typeface="Calibri" pitchFamily="34" charset="0"/>
-                <a:ea typeface="Calibri" pitchFamily="34" charset="-122"/>
-                <a:cs typeface="Calibri" pitchFamily="34" charset="-120"/>
-              </a:rPr>
-              <a:t>Переписанные описания блюд и названия разделов</a:t>
-            </a:r>
-            <a:endParaRPr lang="en-US" sz="1550" dirty="0"/>
-          </a:p>
-        </p:txBody>
-      </p:sp>
-      <p:sp>
-        <p:nvSpPr>
-          <p:cNvPr id="10" name="Shape 8"/>
-          <p:cNvSpPr/>
-          <p:nvPr/>
-        </p:nvSpPr>
-        <p:spPr>
-          <a:xfrm>
-            <a:off x="658368" y="3575304"/>
-            <a:ext cx="10874959" cy="749808"/>
-          </a:xfrm>
-          <a:prstGeom prst="roundRect">
-            <a:avLst>
-              <a:gd name="adj" fmla="val 12195"/>
-            </a:avLst>
-          </a:prstGeom>
-          <a:solidFill>
-            <a:srgbClr val="FFFFFF"/>
-          </a:solidFill>
-          <a:ln w="12700">
-            <a:solidFill>
-              <a:srgbClr val="E8D6C0"/>
-            </a:solidFill>
-            <a:prstDash val="solid"/>
-          </a:ln>
-        </p:spPr>
-      </p:sp>
-      <p:sp>
-        <p:nvSpPr>
-          <p:cNvPr id="11" name="Text 9"/>
-          <p:cNvSpPr/>
-          <p:nvPr/>
-        </p:nvSpPr>
-        <p:spPr>
-          <a:xfrm>
-            <a:off x="886968" y="3575304"/>
-            <a:ext cx="457200" cy="749808"/>
-          </a:xfrm>
-          <a:prstGeom prst="rect">
-            <a:avLst/>
-          </a:prstGeom>
-          <a:noFill/>
-          <a:ln/>
-        </p:spPr>
-        <p:txBody>
-          <a:bodyPr wrap="square" lIns="0" tIns="0" rIns="0" bIns="0" rtlCol="0" anchor="ctr"/>
-          <a:lstStyle/>
-          <a:p>
-            <a:pPr algn="ctr" indent="0" marL="0">
-              <a:buNone/>
-            </a:pPr>
-            <a:r>
-              <a:rPr lang="en-US" sz="1700" b="1" dirty="0">
-                <a:solidFill>
-                  <a:srgbClr val="4B7F52"/>
-                </a:solidFill>
-                <a:latin typeface="Calibri" pitchFamily="34" charset="0"/>
-                <a:ea typeface="Calibri" pitchFamily="34" charset="-122"/>
-                <a:cs typeface="Calibri" pitchFamily="34" charset="-120"/>
-              </a:rPr>
-              <a:t>✓</a:t>
-            </a:r>
-            <a:endParaRPr lang="en-US" sz="1700" dirty="0"/>
-          </a:p>
-        </p:txBody>
-      </p:sp>
-      <p:sp>
-        <p:nvSpPr>
-          <p:cNvPr id="12" name="Text 10"/>
-          <p:cNvSpPr/>
-          <p:nvPr/>
-        </p:nvSpPr>
-        <p:spPr>
-          <a:xfrm>
-            <a:off x="1435608" y="3575304"/>
-            <a:ext cx="9692640" cy="749808"/>
-          </a:xfrm>
-          <a:prstGeom prst="rect">
-            <a:avLst/>
-          </a:prstGeom>
-          <a:noFill/>
-          <a:ln/>
-        </p:spPr>
-        <p:txBody>
-          <a:bodyPr wrap="square" lIns="0" tIns="0" rIns="0" bIns="0" rtlCol="0" anchor="ctr"/>
-          <a:lstStyle/>
-          <a:p>
-            <a:pPr indent="0" marL="0">
-              <a:buNone/>
-            </a:pPr>
-            <a:r>
-              <a:rPr lang="en-US" sz="1550" dirty="0">
+                <a:latin typeface="Bookman Old Style" pitchFamily="34" charset="0"/>
+                <a:ea typeface="Bookman Old Style" pitchFamily="34" charset="-122"/>
+                <a:cs typeface="Bookman Old Style" pitchFamily="34" charset="-120"/>
+              </a:rPr>
+              <a:t>Дизайн-макет</a:t>
+            </a:r>
+            <a:endParaRPr lang="en-US" sz="1800" dirty="0"/>
+          </a:p>
+        </p:txBody>
+      </p:sp>
+      <p:sp>
+        <p:nvSpPr>
+          <p:cNvPr id="14" name="Text 12"/>
+          <p:cNvSpPr/>
+          <p:nvPr/>
+        </p:nvSpPr>
+        <p:spPr>
+          <a:xfrm>
+            <a:off x="4206240" y="3575304"/>
+            <a:ext cx="3291840" cy="365760"/>
+          </a:xfrm>
+          <a:prstGeom prst="rect">
+            <a:avLst/>
+          </a:prstGeom>
+          <a:noFill/>
+          <a:ln/>
+        </p:spPr>
+        <p:txBody>
+          <a:bodyPr wrap="square" lIns="0" tIns="0" rIns="0" bIns="0" rtlCol="0" anchor="ctr"/>
+          <a:lstStyle/>
+          <a:p>
+            <a:pPr indent="0" marL="0">
+              <a:buNone/>
+            </a:pPr>
+            <a:r>
+              <a:rPr lang="en-US" sz="1200" dirty="0">
+                <a:solidFill>
+                  <a:srgbClr val="E8D6C0"/>
+                </a:solidFill>
+                <a:latin typeface="Arial" pitchFamily="34" charset="0"/>
+                <a:ea typeface="Arial" pitchFamily="34" charset="-122"/>
+                <a:cs typeface="Arial" pitchFamily="34" charset="-120"/>
+              </a:rPr>
+              <a:t>..........................................................</a:t>
+            </a:r>
+            <a:endParaRPr lang="en-US" sz="1200" dirty="0"/>
+          </a:p>
+        </p:txBody>
+      </p:sp>
+      <p:sp>
+        <p:nvSpPr>
+          <p:cNvPr id="15" name="Text 13"/>
+          <p:cNvSpPr/>
+          <p:nvPr/>
+        </p:nvSpPr>
+        <p:spPr>
+          <a:xfrm>
+            <a:off x="7589520" y="3447288"/>
+            <a:ext cx="3931920" cy="457200"/>
+          </a:xfrm>
+          <a:prstGeom prst="rect">
+            <a:avLst/>
+          </a:prstGeom>
+          <a:noFill/>
+          <a:ln/>
+        </p:spPr>
+        <p:txBody>
+          <a:bodyPr wrap="square" lIns="0" tIns="0" rIns="0" bIns="0" rtlCol="0" anchor="ctr"/>
+          <a:lstStyle/>
+          <a:p>
+            <a:pPr algn="r" indent="0" marL="0">
+              <a:buNone/>
+            </a:pPr>
+            <a:r>
+              <a:rPr lang="en-US" sz="1400" dirty="0">
+                <a:solidFill>
+                  <a:srgbClr val="8A6B58"/>
+                </a:solidFill>
+                <a:latin typeface="Arial" pitchFamily="34" charset="0"/>
+                <a:ea typeface="Arial" pitchFamily="34" charset="-122"/>
+                <a:cs typeface="Arial" pitchFamily="34" charset="-120"/>
+              </a:rPr>
+              <a:t>меню для зала и для доставки</a:t>
+            </a:r>
+            <a:endParaRPr lang="en-US" sz="1400" dirty="0"/>
+          </a:p>
+        </p:txBody>
+      </p:sp>
+      <p:sp>
+        <p:nvSpPr>
+          <p:cNvPr id="16" name="Text 14"/>
+          <p:cNvSpPr/>
+          <p:nvPr/>
+        </p:nvSpPr>
+        <p:spPr>
+          <a:xfrm>
+            <a:off x="658368" y="4233672"/>
+            <a:ext cx="548640" cy="457200"/>
+          </a:xfrm>
+          <a:prstGeom prst="rect">
+            <a:avLst/>
+          </a:prstGeom>
+          <a:noFill/>
+          <a:ln/>
+        </p:spPr>
+        <p:txBody>
+          <a:bodyPr wrap="square" lIns="0" tIns="0" rIns="0" bIns="0" rtlCol="0" anchor="ctr"/>
+          <a:lstStyle/>
+          <a:p>
+            <a:pPr indent="0" marL="0">
+              <a:buNone/>
+            </a:pPr>
+            <a:r>
+              <a:rPr lang="en-US" sz="1600" b="1" dirty="0">
+                <a:solidFill>
+                  <a:srgbClr val="E0A100"/>
+                </a:solidFill>
+                <a:latin typeface="Bookman Old Style" pitchFamily="34" charset="0"/>
+                <a:ea typeface="Bookman Old Style" pitchFamily="34" charset="-122"/>
+                <a:cs typeface="Bookman Old Style" pitchFamily="34" charset="-120"/>
+              </a:rPr>
+              <a:t>04</a:t>
+            </a:r>
+            <a:endParaRPr lang="en-US" sz="1600" dirty="0"/>
+          </a:p>
+        </p:txBody>
+      </p:sp>
+      <p:sp>
+        <p:nvSpPr>
+          <p:cNvPr id="17" name="Text 15"/>
+          <p:cNvSpPr/>
+          <p:nvPr/>
+        </p:nvSpPr>
+        <p:spPr>
+          <a:xfrm>
+            <a:off x="1252728" y="4233672"/>
+            <a:ext cx="3474720" cy="457200"/>
+          </a:xfrm>
+          <a:prstGeom prst="rect">
+            <a:avLst/>
+          </a:prstGeom>
+          <a:noFill/>
+          <a:ln/>
+        </p:spPr>
+        <p:txBody>
+          <a:bodyPr wrap="square" lIns="0" tIns="0" rIns="0" bIns="0" rtlCol="0" anchor="ctr"/>
+          <a:lstStyle/>
+          <a:p>
+            <a:pPr indent="0" marL="0">
+              <a:buNone/>
+            </a:pPr>
+            <a:r>
+              <a:rPr lang="en-US" sz="1800" b="1" dirty="0">
                 <a:solidFill>
                   <a:srgbClr val="2A1620"/>
                 </a:solidFill>
-                <a:latin typeface="Calibri" pitchFamily="34" charset="0"/>
-                <a:ea typeface="Calibri" pitchFamily="34" charset="-122"/>
-                <a:cs typeface="Calibri" pitchFamily="34" charset="-120"/>
-              </a:rPr>
-              <a:t>Дизайн-макет меню для зала и доставки</a:t>
-            </a:r>
-            <a:endParaRPr lang="en-US" sz="1550" dirty="0"/>
-          </a:p>
-        </p:txBody>
-      </p:sp>
-      <p:sp>
-        <p:nvSpPr>
-          <p:cNvPr id="13" name="Shape 11"/>
-          <p:cNvSpPr/>
-          <p:nvPr/>
-        </p:nvSpPr>
-        <p:spPr>
-          <a:xfrm>
-            <a:off x="658368" y="4471416"/>
-            <a:ext cx="10874959" cy="749808"/>
-          </a:xfrm>
-          <a:prstGeom prst="roundRect">
-            <a:avLst>
-              <a:gd name="adj" fmla="val 12195"/>
-            </a:avLst>
-          </a:prstGeom>
-          <a:solidFill>
-            <a:srgbClr val="FFFFFF"/>
-          </a:solidFill>
-          <a:ln w="12700">
-            <a:solidFill>
-              <a:srgbClr val="E8D6C0"/>
-            </a:solidFill>
-            <a:prstDash val="solid"/>
-          </a:ln>
-        </p:spPr>
-      </p:sp>
-      <p:sp>
-        <p:nvSpPr>
-          <p:cNvPr id="14" name="Text 12"/>
-          <p:cNvSpPr/>
-          <p:nvPr/>
-        </p:nvSpPr>
-        <p:spPr>
-          <a:xfrm>
-            <a:off x="886968" y="4471416"/>
-            <a:ext cx="457200" cy="749808"/>
-          </a:xfrm>
-          <a:prstGeom prst="rect">
-            <a:avLst/>
-          </a:prstGeom>
-          <a:noFill/>
-          <a:ln/>
-        </p:spPr>
-        <p:txBody>
-          <a:bodyPr wrap="square" lIns="0" tIns="0" rIns="0" bIns="0" rtlCol="0" anchor="ctr"/>
-          <a:lstStyle/>
-          <a:p>
-            <a:pPr algn="ctr" indent="0" marL="0">
-              <a:buNone/>
-            </a:pPr>
-            <a:r>
-              <a:rPr lang="en-US" sz="1700" b="1" dirty="0">
-                <a:solidFill>
-                  <a:srgbClr val="4B7F52"/>
-                </a:solidFill>
-                <a:latin typeface="Calibri" pitchFamily="34" charset="0"/>
-                <a:ea typeface="Calibri" pitchFamily="34" charset="-122"/>
-                <a:cs typeface="Calibri" pitchFamily="34" charset="-120"/>
-              </a:rPr>
-              <a:t>✓</a:t>
-            </a:r>
-            <a:endParaRPr lang="en-US" sz="1700" dirty="0"/>
-          </a:p>
-        </p:txBody>
-      </p:sp>
-      <p:sp>
-        <p:nvSpPr>
-          <p:cNvPr id="15" name="Text 13"/>
-          <p:cNvSpPr/>
-          <p:nvPr/>
-        </p:nvSpPr>
-        <p:spPr>
-          <a:xfrm>
-            <a:off x="1435608" y="4471416"/>
-            <a:ext cx="9692640" cy="749808"/>
-          </a:xfrm>
-          <a:prstGeom prst="rect">
-            <a:avLst/>
-          </a:prstGeom>
-          <a:noFill/>
-          <a:ln/>
-        </p:spPr>
-        <p:txBody>
-          <a:bodyPr wrap="square" lIns="0" tIns="0" rIns="0" bIns="0" rtlCol="0" anchor="ctr"/>
-          <a:lstStyle/>
-          <a:p>
-            <a:pPr indent="0" marL="0">
-              <a:buNone/>
-            </a:pPr>
-            <a:r>
-              <a:rPr lang="en-US" sz="1550" dirty="0">
+                <a:latin typeface="Bookman Old Style" pitchFamily="34" charset="0"/>
+                <a:ea typeface="Bookman Old Style" pitchFamily="34" charset="-122"/>
+                <a:cs typeface="Bookman Old Style" pitchFamily="34" charset="-120"/>
+              </a:rPr>
+              <a:t>Календарь поводов</a:t>
+            </a:r>
+            <a:endParaRPr lang="en-US" sz="1800" dirty="0"/>
+          </a:p>
+        </p:txBody>
+      </p:sp>
+      <p:sp>
+        <p:nvSpPr>
+          <p:cNvPr id="18" name="Text 16"/>
+          <p:cNvSpPr/>
+          <p:nvPr/>
+        </p:nvSpPr>
+        <p:spPr>
+          <a:xfrm>
+            <a:off x="4206240" y="4361688"/>
+            <a:ext cx="3291840" cy="365760"/>
+          </a:xfrm>
+          <a:prstGeom prst="rect">
+            <a:avLst/>
+          </a:prstGeom>
+          <a:noFill/>
+          <a:ln/>
+        </p:spPr>
+        <p:txBody>
+          <a:bodyPr wrap="square" lIns="0" tIns="0" rIns="0" bIns="0" rtlCol="0" anchor="ctr"/>
+          <a:lstStyle/>
+          <a:p>
+            <a:pPr indent="0" marL="0">
+              <a:buNone/>
+            </a:pPr>
+            <a:r>
+              <a:rPr lang="en-US" sz="1200" dirty="0">
+                <a:solidFill>
+                  <a:srgbClr val="E8D6C0"/>
+                </a:solidFill>
+                <a:latin typeface="Arial" pitchFamily="34" charset="0"/>
+                <a:ea typeface="Arial" pitchFamily="34" charset="-122"/>
+                <a:cs typeface="Arial" pitchFamily="34" charset="-120"/>
+              </a:rPr>
+              <a:t>..........................................................</a:t>
+            </a:r>
+            <a:endParaRPr lang="en-US" sz="1200" dirty="0"/>
+          </a:p>
+        </p:txBody>
+      </p:sp>
+      <p:sp>
+        <p:nvSpPr>
+          <p:cNvPr id="19" name="Text 17"/>
+          <p:cNvSpPr/>
+          <p:nvPr/>
+        </p:nvSpPr>
+        <p:spPr>
+          <a:xfrm>
+            <a:off x="7589520" y="4233672"/>
+            <a:ext cx="3931920" cy="457200"/>
+          </a:xfrm>
+          <a:prstGeom prst="rect">
+            <a:avLst/>
+          </a:prstGeom>
+          <a:noFill/>
+          <a:ln/>
+        </p:spPr>
+        <p:txBody>
+          <a:bodyPr wrap="square" lIns="0" tIns="0" rIns="0" bIns="0" rtlCol="0" anchor="ctr"/>
+          <a:lstStyle/>
+          <a:p>
+            <a:pPr algn="r" indent="0" marL="0">
+              <a:buNone/>
+            </a:pPr>
+            <a:r>
+              <a:rPr lang="en-US" sz="1400" dirty="0">
+                <a:solidFill>
+                  <a:srgbClr val="8A6B58"/>
+                </a:solidFill>
+                <a:latin typeface="Arial" pitchFamily="34" charset="0"/>
+                <a:ea typeface="Arial" pitchFamily="34" charset="-122"/>
+                <a:cs typeface="Arial" pitchFamily="34" charset="-120"/>
+              </a:rPr>
+              <a:t>будни, сезон, события</a:t>
+            </a:r>
+            <a:endParaRPr lang="en-US" sz="1400" dirty="0"/>
+          </a:p>
+        </p:txBody>
+      </p:sp>
+      <p:sp>
+        <p:nvSpPr>
+          <p:cNvPr id="20" name="Text 18"/>
+          <p:cNvSpPr/>
+          <p:nvPr/>
+        </p:nvSpPr>
+        <p:spPr>
+          <a:xfrm>
+            <a:off x="658368" y="5020056"/>
+            <a:ext cx="548640" cy="457200"/>
+          </a:xfrm>
+          <a:prstGeom prst="rect">
+            <a:avLst/>
+          </a:prstGeom>
+          <a:noFill/>
+          <a:ln/>
+        </p:spPr>
+        <p:txBody>
+          <a:bodyPr wrap="square" lIns="0" tIns="0" rIns="0" bIns="0" rtlCol="0" anchor="ctr"/>
+          <a:lstStyle/>
+          <a:p>
+            <a:pPr indent="0" marL="0">
+              <a:buNone/>
+            </a:pPr>
+            <a:r>
+              <a:rPr lang="en-US" sz="1600" b="1" dirty="0">
+                <a:solidFill>
+                  <a:srgbClr val="E0A100"/>
+                </a:solidFill>
+                <a:latin typeface="Bookman Old Style" pitchFamily="34" charset="0"/>
+                <a:ea typeface="Bookman Old Style" pitchFamily="34" charset="-122"/>
+                <a:cs typeface="Bookman Old Style" pitchFamily="34" charset="-120"/>
+              </a:rPr>
+              <a:t>05</a:t>
+            </a:r>
+            <a:endParaRPr lang="en-US" sz="1600" dirty="0"/>
+          </a:p>
+        </p:txBody>
+      </p:sp>
+      <p:sp>
+        <p:nvSpPr>
+          <p:cNvPr id="21" name="Text 19"/>
+          <p:cNvSpPr/>
+          <p:nvPr/>
+        </p:nvSpPr>
+        <p:spPr>
+          <a:xfrm>
+            <a:off x="1252728" y="5020056"/>
+            <a:ext cx="3474720" cy="457200"/>
+          </a:xfrm>
+          <a:prstGeom prst="rect">
+            <a:avLst/>
+          </a:prstGeom>
+          <a:noFill/>
+          <a:ln/>
+        </p:spPr>
+        <p:txBody>
+          <a:bodyPr wrap="square" lIns="0" tIns="0" rIns="0" bIns="0" rtlCol="0" anchor="ctr"/>
+          <a:lstStyle/>
+          <a:p>
+            <a:pPr indent="0" marL="0">
+              <a:buNone/>
+            </a:pPr>
+            <a:r>
+              <a:rPr lang="en-US" sz="1800" b="1" dirty="0">
                 <a:solidFill>
                   <a:srgbClr val="2A1620"/>
                 </a:solidFill>
-                <a:latin typeface="Calibri" pitchFamily="34" charset="0"/>
-                <a:ea typeface="Calibri" pitchFamily="34" charset="-122"/>
-                <a:cs typeface="Calibri" pitchFamily="34" charset="-120"/>
-              </a:rPr>
-              <a:t>Календарь поводов на будни и сезон</a:t>
-            </a:r>
-            <a:endParaRPr lang="en-US" sz="1550" dirty="0"/>
-          </a:p>
-        </p:txBody>
-      </p:sp>
-      <p:sp>
-        <p:nvSpPr>
-          <p:cNvPr id="16" name="Shape 14"/>
-          <p:cNvSpPr/>
-          <p:nvPr/>
-        </p:nvSpPr>
-        <p:spPr>
-          <a:xfrm>
-            <a:off x="658368" y="5367528"/>
-            <a:ext cx="10874959" cy="749808"/>
-          </a:xfrm>
-          <a:prstGeom prst="roundRect">
-            <a:avLst>
-              <a:gd name="adj" fmla="val 12195"/>
-            </a:avLst>
-          </a:prstGeom>
-          <a:solidFill>
-            <a:srgbClr val="FFFFFF"/>
-          </a:solidFill>
-          <a:ln w="12700">
-            <a:solidFill>
-              <a:srgbClr val="E8D6C0"/>
-            </a:solidFill>
-            <a:prstDash val="solid"/>
-          </a:ln>
-        </p:spPr>
-      </p:sp>
-      <p:sp>
-        <p:nvSpPr>
-          <p:cNvPr id="17" name="Text 15"/>
-          <p:cNvSpPr/>
-          <p:nvPr/>
-        </p:nvSpPr>
-        <p:spPr>
-          <a:xfrm>
-            <a:off x="886968" y="5367528"/>
-            <a:ext cx="457200" cy="749808"/>
-          </a:xfrm>
-          <a:prstGeom prst="rect">
-            <a:avLst/>
-          </a:prstGeom>
-          <a:noFill/>
-          <a:ln/>
-        </p:spPr>
-        <p:txBody>
-          <a:bodyPr wrap="square" lIns="0" tIns="0" rIns="0" bIns="0" rtlCol="0" anchor="ctr"/>
-          <a:lstStyle/>
-          <a:p>
-            <a:pPr algn="ctr" indent="0" marL="0">
-              <a:buNone/>
-            </a:pPr>
-            <a:r>
-              <a:rPr lang="en-US" sz="1700" b="1" dirty="0">
-                <a:solidFill>
-                  <a:srgbClr val="4B7F52"/>
-                </a:solidFill>
-                <a:latin typeface="Calibri" pitchFamily="34" charset="0"/>
-                <a:ea typeface="Calibri" pitchFamily="34" charset="-122"/>
-                <a:cs typeface="Calibri" pitchFamily="34" charset="-120"/>
-              </a:rPr>
-              <a:t>✓</a:t>
-            </a:r>
-            <a:endParaRPr lang="en-US" sz="1700" dirty="0"/>
-          </a:p>
-        </p:txBody>
-      </p:sp>
-      <p:sp>
-        <p:nvSpPr>
-          <p:cNvPr id="18" name="Text 16"/>
-          <p:cNvSpPr/>
-          <p:nvPr/>
-        </p:nvSpPr>
-        <p:spPr>
-          <a:xfrm>
-            <a:off x="1435608" y="5367528"/>
-            <a:ext cx="9692640" cy="749808"/>
-          </a:xfrm>
-          <a:prstGeom prst="rect">
-            <a:avLst/>
-          </a:prstGeom>
-          <a:noFill/>
-          <a:ln/>
-        </p:spPr>
-        <p:txBody>
-          <a:bodyPr wrap="square" lIns="0" tIns="0" rIns="0" bIns="0" rtlCol="0" anchor="ctr"/>
-          <a:lstStyle/>
-          <a:p>
-            <a:pPr indent="0" marL="0">
-              <a:buNone/>
-            </a:pPr>
-            <a:r>
-              <a:rPr lang="en-US" sz="1550" dirty="0">
-                <a:solidFill>
-                  <a:srgbClr val="2A1620"/>
-                </a:solidFill>
-                <a:latin typeface="Calibri" pitchFamily="34" charset="0"/>
-                <a:ea typeface="Calibri" pitchFamily="34" charset="-122"/>
-                <a:cs typeface="Calibri" pitchFamily="34" charset="-120"/>
-              </a:rPr>
-              <a:t>Пакет постов и баннеров под спецпредложения</a:t>
-            </a:r>
-            <a:endParaRPr lang="en-US" sz="1550" dirty="0"/>
+                <a:latin typeface="Bookman Old Style" pitchFamily="34" charset="0"/>
+                <a:ea typeface="Bookman Old Style" pitchFamily="34" charset="-122"/>
+                <a:cs typeface="Bookman Old Style" pitchFamily="34" charset="-120"/>
+              </a:rPr>
+              <a:t>Промо-пакет</a:t>
+            </a:r>
+            <a:endParaRPr lang="en-US" sz="1800" dirty="0"/>
+          </a:p>
+        </p:txBody>
+      </p:sp>
+      <p:sp>
+        <p:nvSpPr>
+          <p:cNvPr id="22" name="Text 20"/>
+          <p:cNvSpPr/>
+          <p:nvPr/>
+        </p:nvSpPr>
+        <p:spPr>
+          <a:xfrm>
+            <a:off x="4206240" y="5148072"/>
+            <a:ext cx="3291840" cy="365760"/>
+          </a:xfrm>
+          <a:prstGeom prst="rect">
+            <a:avLst/>
+          </a:prstGeom>
+          <a:noFill/>
+          <a:ln/>
+        </p:spPr>
+        <p:txBody>
+          <a:bodyPr wrap="square" lIns="0" tIns="0" rIns="0" bIns="0" rtlCol="0" anchor="ctr"/>
+          <a:lstStyle/>
+          <a:p>
+            <a:pPr indent="0" marL="0">
+              <a:buNone/>
+            </a:pPr>
+            <a:r>
+              <a:rPr lang="en-US" sz="1200" dirty="0">
+                <a:solidFill>
+                  <a:srgbClr val="E8D6C0"/>
+                </a:solidFill>
+                <a:latin typeface="Arial" pitchFamily="34" charset="0"/>
+                <a:ea typeface="Arial" pitchFamily="34" charset="-122"/>
+                <a:cs typeface="Arial" pitchFamily="34" charset="-120"/>
+              </a:rPr>
+              <a:t>..........................................................</a:t>
+            </a:r>
+            <a:endParaRPr lang="en-US" sz="1200" dirty="0"/>
+          </a:p>
+        </p:txBody>
+      </p:sp>
+      <p:sp>
+        <p:nvSpPr>
+          <p:cNvPr id="23" name="Text 21"/>
+          <p:cNvSpPr/>
+          <p:nvPr/>
+        </p:nvSpPr>
+        <p:spPr>
+          <a:xfrm>
+            <a:off x="7589520" y="5020056"/>
+            <a:ext cx="3931920" cy="457200"/>
+          </a:xfrm>
+          <a:prstGeom prst="rect">
+            <a:avLst/>
+          </a:prstGeom>
+          <a:noFill/>
+          <a:ln/>
+        </p:spPr>
+        <p:txBody>
+          <a:bodyPr wrap="square" lIns="0" tIns="0" rIns="0" bIns="0" rtlCol="0" anchor="ctr"/>
+          <a:lstStyle/>
+          <a:p>
+            <a:pPr algn="r" indent="0" marL="0">
+              <a:buNone/>
+            </a:pPr>
+            <a:r>
+              <a:rPr lang="en-US" sz="1400" dirty="0">
+                <a:solidFill>
+                  <a:srgbClr val="8A6B58"/>
+                </a:solidFill>
+                <a:latin typeface="Arial" pitchFamily="34" charset="0"/>
+                <a:ea typeface="Arial" pitchFamily="34" charset="-122"/>
+                <a:cs typeface="Arial" pitchFamily="34" charset="-120"/>
+              </a:rPr>
+              <a:t>посты и баннеры под спецпредложения</a:t>
+            </a:r>
+            <a:endParaRPr lang="en-US" sz="1400" dirty="0"/>
           </a:p>
         </p:txBody>
       </p:sp>

--- a/public/decks/horeca.pptx
+++ b/public/decks/horeca.pptx
@@ -511,7 +511,7 @@
           <a:p>
             <a:r>
               <a:rPr lang="en-US" dirty="0"/>
-              <a:t>Заходим не с «сделайте рекламу», а с того, что меню — главный продавец в зале.</a:t>
+              <a:t>Меню — главный продавец в зале.</a:t>
             </a:r>
             <a:endParaRPr lang="en-US" dirty="0"/>
           </a:p>
@@ -1678,7 +1678,7 @@
       </p:grpSpPr>
       <p:pic>
         <p:nvPicPr>
-          <p:cNvPr id="2" name="Image 0" descr="C:\Users\79204\AppData\Local\Temp\claude\D--QQQAAA\1af986dc-9216-4466-ab30-3032c2f138c7\scratchpad\deck\img\ho-table-band.png">    </p:cNvPr>
+          <p:cNvPr id="2" name="Image 0" descr="C:\Users\79204\AppData\Local\Temp\claude\D--QQQAAA\1af986dc-9216-4466-ab30-3032c2f138c7\scratchpad\deck\img\ho-hero-plate.png">    </p:cNvPr>
           <p:cNvPicPr>
             <a:picLocks noChangeAspect="1"/>
           </p:cNvPicPr>
@@ -1692,8 +1692,8 @@
         </p:blipFill>
         <p:spPr>
           <a:xfrm>
-            <a:off x="0" y="3657600"/>
-            <a:ext cx="12191695" cy="3200400"/>
+            <a:off x="6245352" y="228600"/>
+            <a:ext cx="6400800" cy="6400800"/>
           </a:xfrm>
           <a:prstGeom prst="rect">
             <a:avLst/>
@@ -1709,7 +1709,7 @@
         <p:spPr>
           <a:xfrm>
             <a:off x="0" y="0"/>
-            <a:ext cx="12191695" cy="3675888"/>
+            <a:ext cx="6309360" cy="6858000"/>
           </a:xfrm>
           <a:prstGeom prst="rect">
             <a:avLst/>
@@ -1728,7 +1728,7 @@
         </p:nvSpPr>
         <p:spPr>
           <a:xfrm>
-            <a:off x="658368" y="457200"/>
+            <a:off x="658368" y="548640"/>
             <a:ext cx="5486400" cy="274320"/>
           </a:xfrm>
           <a:prstGeom prst="rect">
@@ -1775,13 +1775,33 @@
       </p:sp>
       <p:sp>
         <p:nvSpPr>
-          <p:cNvPr id="5" name="Text 2"/>
-          <p:cNvSpPr/>
-          <p:nvPr/>
-        </p:nvSpPr>
-        <p:spPr>
-          <a:xfrm>
-            <a:off x="658368" y="1051560"/>
+          <p:cNvPr id="5" name="Shape 2"/>
+          <p:cNvSpPr/>
+          <p:nvPr/>
+        </p:nvSpPr>
+        <p:spPr>
+          <a:xfrm>
+            <a:off x="658368" y="1371600"/>
+            <a:ext cx="4937760" cy="27432"/>
+          </a:xfrm>
+          <a:prstGeom prst="rect">
+            <a:avLst/>
+          </a:prstGeom>
+          <a:solidFill>
+            <a:srgbClr val="E0A100"/>
+          </a:solidFill>
+          <a:ln/>
+        </p:spPr>
+      </p:sp>
+      <p:sp>
+        <p:nvSpPr>
+          <p:cNvPr id="6" name="Text 3"/>
+          <p:cNvSpPr/>
+          <p:nvPr/>
+        </p:nvSpPr>
+        <p:spPr>
+          <a:xfrm>
+            <a:off x="658368" y="1517904"/>
             <a:ext cx="8229600" cy="274320"/>
           </a:xfrm>
           <a:prstGeom prst="rect">
@@ -1814,30 +1834,30 @@
       </p:sp>
       <p:sp>
         <p:nvSpPr>
-          <p:cNvPr id="6" name="Text 3"/>
-          <p:cNvSpPr/>
-          <p:nvPr/>
-        </p:nvSpPr>
-        <p:spPr>
-          <a:xfrm>
-            <a:off x="658368" y="1371600"/>
-            <a:ext cx="10789920" cy="1051560"/>
-          </a:xfrm>
-          <a:prstGeom prst="rect">
-            <a:avLst/>
-          </a:prstGeom>
-          <a:noFill/>
-          <a:ln/>
-        </p:spPr>
-        <p:txBody>
-          <a:bodyPr wrap="square" lIns="0" tIns="0" rIns="0" bIns="0" rtlCol="0" anchor="ctr"/>
-          <a:lstStyle/>
-          <a:p>
-            <a:pPr indent="0" marL="0">
-              <a:buNone/>
-            </a:pPr>
-            <a:r>
-              <a:rPr lang="en-US" sz="5400" b="1" dirty="0">
+          <p:cNvPr id="7" name="Text 4"/>
+          <p:cNvSpPr/>
+          <p:nvPr/>
+        </p:nvSpPr>
+        <p:spPr>
+          <a:xfrm>
+            <a:off x="658368" y="2148840"/>
+            <a:ext cx="5120640" cy="868680"/>
+          </a:xfrm>
+          <a:prstGeom prst="rect">
+            <a:avLst/>
+          </a:prstGeom>
+          <a:noFill/>
+          <a:ln/>
+        </p:spPr>
+        <p:txBody>
+          <a:bodyPr wrap="square" lIns="0" tIns="0" rIns="0" bIns="0" rtlCol="0" anchor="ctr"/>
+          <a:lstStyle/>
+          <a:p>
+            <a:pPr indent="0" marL="0">
+              <a:buNone/>
+            </a:pPr>
+            <a:r>
+              <a:rPr lang="en-US" sz="4600" b="1" dirty="0">
                 <a:solidFill>
                   <a:srgbClr val="FFFFFF"/>
                 </a:solidFill>
@@ -1845,22 +1865,61 @@
                 <a:ea typeface="Bookman Old Style" pitchFamily="34" charset="-122"/>
                 <a:cs typeface="Bookman Old Style" pitchFamily="34" charset="-120"/>
               </a:rPr>
-              <a:t>Меню, которое продаёт</a:t>
-            </a:r>
-            <a:endParaRPr lang="en-US" sz="5400" dirty="0"/>
-          </a:p>
-        </p:txBody>
-      </p:sp>
-      <p:sp>
-        <p:nvSpPr>
-          <p:cNvPr id="7" name="Text 4"/>
-          <p:cNvSpPr/>
-          <p:nvPr/>
-        </p:nvSpPr>
-        <p:spPr>
-          <a:xfrm>
-            <a:off x="658368" y="2487168"/>
-            <a:ext cx="7680960" cy="731520"/>
+              <a:t>Гость выбирает</a:t>
+            </a:r>
+            <a:endParaRPr lang="en-US" sz="4600" dirty="0"/>
+          </a:p>
+        </p:txBody>
+      </p:sp>
+      <p:sp>
+        <p:nvSpPr>
+          <p:cNvPr id="8" name="Text 5"/>
+          <p:cNvSpPr/>
+          <p:nvPr/>
+        </p:nvSpPr>
+        <p:spPr>
+          <a:xfrm>
+            <a:off x="658368" y="2971800"/>
+            <a:ext cx="5120640" cy="868680"/>
+          </a:xfrm>
+          <a:prstGeom prst="rect">
+            <a:avLst/>
+          </a:prstGeom>
+          <a:noFill/>
+          <a:ln/>
+        </p:spPr>
+        <p:txBody>
+          <a:bodyPr wrap="square" lIns="0" tIns="0" rIns="0" bIns="0" rtlCol="0" anchor="ctr"/>
+          <a:lstStyle/>
+          <a:p>
+            <a:pPr indent="0" marL="0">
+              <a:buNone/>
+            </a:pPr>
+            <a:r>
+              <a:rPr lang="en-US" sz="4600" b="1" dirty="0">
+                <a:solidFill>
+                  <a:srgbClr val="F2C14E"/>
+                </a:solidFill>
+                <a:latin typeface="Bookman Old Style" pitchFamily="34" charset="0"/>
+                <a:ea typeface="Bookman Old Style" pitchFamily="34" charset="-122"/>
+                <a:cs typeface="Bookman Old Style" pitchFamily="34" charset="-120"/>
+              </a:rPr>
+              <a:t>глазами</a:t>
+            </a:r>
+            <a:endParaRPr lang="en-US" sz="4600" dirty="0"/>
+          </a:p>
+        </p:txBody>
+      </p:sp>
+      <p:sp>
+        <p:nvSpPr>
+          <p:cNvPr id="9" name="Text 6"/>
+          <p:cNvSpPr/>
+          <p:nvPr/>
+        </p:nvSpPr>
+        <p:spPr>
+          <a:xfrm>
+            <a:off x="658368" y="4160520"/>
+            <a:ext cx="4846320" cy="914400"/>
           </a:xfrm>
           <a:prstGeom prst="rect">
             <a:avLst/>
@@ -1879,7 +1938,7 @@
               <a:buNone/>
             </a:pPr>
             <a:r>
-              <a:rPr lang="en-US" sz="1700" dirty="0">
+              <a:rPr lang="en-US" sz="1600" dirty="0">
                 <a:solidFill>
                   <a:srgbClr val="E3CDBB"/>
                 </a:solidFill>
@@ -1887,31 +1946,31 @@
                 <a:ea typeface="Arial" pitchFamily="34" charset="-122"/>
                 <a:cs typeface="Arial" pitchFamily="34" charset="-120"/>
               </a:rPr>
-              <a:t>Как поднять средний чек и заполнить будни,</a:t>
-            </a:r>
-            <a:endParaRPr lang="en-US" sz="1700" dirty="0"/>
-          </a:p>
-          <a:p>
-            <a:pPr indent="0" marL="0">
-              <a:lnSpc>
-                <a:spcPct val="115000"/>
-              </a:lnSpc>
-              <a:buNone/>
-            </a:pPr>
-            <a:r>
-              <a:rPr lang="en-US" sz="1700" dirty="0">
-                <a:solidFill>
-                  <a:srgbClr val="E3CDBB"/>
-                </a:solidFill>
-                <a:latin typeface="Arial" pitchFamily="34" charset="0"/>
-                <a:ea typeface="Arial" pitchFamily="34" charset="-122"/>
-                <a:cs typeface="Arial" pitchFamily="34" charset="-120"/>
-              </a:rPr>
-              <a:t>не трогая цены в прайсе</a:t>
-            </a:r>
-            <a:endParaRPr lang="en-US" sz="1700" dirty="0"/>
-          </a:p>
-        </p:txBody>
+              <a:t>Как поднять средний чек и заполнить будни, не трогая цены в прайсе</a:t>
+            </a:r>
+            <a:endParaRPr lang="en-US" sz="1600" dirty="0"/>
+          </a:p>
+        </p:txBody>
+      </p:sp>
+      <p:sp>
+        <p:nvSpPr>
+          <p:cNvPr id="10" name="Shape 7"/>
+          <p:cNvSpPr/>
+          <p:nvPr/>
+        </p:nvSpPr>
+        <p:spPr>
+          <a:xfrm>
+            <a:off x="658368" y="5212080"/>
+            <a:ext cx="4937760" cy="27432"/>
+          </a:xfrm>
+          <a:prstGeom prst="rect">
+            <a:avLst/>
+          </a:prstGeom>
+          <a:solidFill>
+            <a:srgbClr val="E0A100"/>
+          </a:solidFill>
+          <a:ln/>
+        </p:spPr>
       </p:sp>
     </p:spTree>
   </p:cSld>
